--- a/RRB_Trump_Epstein_playground_Nagyteteny_ppt2 (1).pptx
+++ b/RRB_Trump_Epstein_playground_Nagyteteny_ppt2 (1).pptx
@@ -5901,45 +5901,13 @@
         </p:spPr>
         <p:txBody>
           <a:bodyPr>
-            <a:normAutofit/>
+            <a:noAutofit/>
           </a:bodyPr>
           <a:lstStyle/>
           <a:p>
             <a:r>
-              <a:rPr lang="hu-HU" sz="2000" b="1" dirty="0"/>
-              <a:t>Téma: programozási környezetben a változók használatának bemutatása. hol fordul elő? php, </a:t>
-            </a:r>
-            <a:r>
-              <a:rPr lang="hu-HU" sz="2000" b="1" dirty="0" err="1"/>
-              <a:t>javascript</a:t>
-            </a:r>
-            <a:r>
-              <a:rPr lang="hu-HU" sz="2000" b="1" dirty="0"/>
-              <a:t> </a:t>
-            </a:r>
-            <a:r>
-              <a:rPr lang="hu-HU" sz="2000" b="1" dirty="0" err="1"/>
-              <a:t>python</a:t>
-            </a:r>
-            <a:r>
-              <a:rPr lang="hu-HU" sz="2000" b="1" dirty="0"/>
-              <a:t> c# </a:t>
-            </a:r>
-            <a:r>
-              <a:rPr lang="hu-HU" sz="2000" b="1" dirty="0" err="1"/>
-              <a:t>stb</a:t>
-            </a:r>
-            <a:r>
-              <a:rPr lang="hu-HU" sz="2000" b="1" dirty="0"/>
-              <a:t> amiket tanultunk, konstans </a:t>
-            </a:r>
-            <a:r>
-              <a:rPr lang="hu-HU" sz="2000" b="1" dirty="0" err="1"/>
-              <a:t>talalók</a:t>
-            </a:r>
-            <a:r>
-              <a:rPr lang="hu-HU" sz="2000" b="1" dirty="0"/>
-              <a:t> rugalmas nem rugalmas</a:t>
+              <a:rPr lang="hu-HU" sz="3200" b="1" dirty="0"/>
+              <a:t>Programozási környezetben a változók használatának bemutatása, és hol fordulnak elő?</a:t>
             </a:r>
           </a:p>
         </p:txBody>
@@ -5967,82 +5935,98 @@
           </a:xfrm>
         </p:spPr>
         <p:txBody>
-          <a:bodyPr/>
-          <a:lstStyle/>
-          <a:p>
-            <a:r>
-              <a:rPr lang="hu-HU" b="1" dirty="0"/>
-              <a:t>Készítette</a:t>
-            </a:r>
-            <a:r>
-              <a:rPr lang="hu-HU" b="1"/>
-              <a:t>: Czeglédi Tung</a:t>
-            </a:r>
-            <a:r>
-              <a:rPr lang="hu-HU" b="1" dirty="0"/>
+          <a:bodyPr>
+            <a:normAutofit/>
+          </a:bodyPr>
+          <a:lstStyle/>
+          <a:p>
+            <a:r>
+              <a:rPr lang="hu-HU" sz="2000" b="1" dirty="0"/>
+              <a:t>Készítette: Czeglédi </a:t>
+            </a:r>
+            <a:r>
+              <a:rPr lang="hu-HU" sz="2000" b="1" dirty="0" err="1"/>
+              <a:t>Tung</a:t>
+            </a:r>
+            <a:r>
+              <a:rPr lang="hu-HU" sz="2000" b="1" dirty="0"/>
               <a:t> </a:t>
             </a:r>
             <a:r>
-              <a:rPr lang="hu-HU" b="1" dirty="0" err="1"/>
+              <a:rPr lang="hu-HU" sz="2000" b="1" dirty="0" err="1"/>
               <a:t>Tung</a:t>
             </a:r>
             <a:r>
-              <a:rPr lang="hu-HU" b="1" dirty="0"/>
+              <a:rPr lang="hu-HU" sz="2000" b="1" dirty="0"/>
               <a:t> </a:t>
             </a:r>
             <a:r>
-              <a:rPr lang="hu-HU" b="1" dirty="0" err="1"/>
+              <a:rPr lang="hu-HU" sz="2000" b="1" dirty="0" err="1"/>
               <a:t>Tung</a:t>
             </a:r>
             <a:r>
-              <a:rPr lang="hu-HU" b="1" dirty="0"/>
+              <a:rPr lang="hu-HU" sz="2000" b="1" dirty="0"/>
               <a:t> Rokkó </a:t>
             </a:r>
             <a:r>
-              <a:rPr lang="hu-HU" b="1" dirty="0" err="1"/>
+              <a:rPr lang="hu-HU" sz="2000" b="1" dirty="0" err="1"/>
               <a:t>Sahur</a:t>
             </a:r>
             <a:r>
-              <a:rPr lang="hu-HU" b="1" dirty="0"/>
-              <a:t>, Megyeri </a:t>
-            </a:r>
-            <a:r>
-              <a:rPr lang="hu-HU" b="1" dirty="0" err="1"/>
+              <a:rPr lang="hu-HU" sz="2000" b="1" dirty="0"/>
+              <a:t>,</a:t>
+            </a:r>
+            <a:br>
+              <a:rPr lang="hu-HU" sz="2000" b="1" dirty="0"/>
+            </a:br>
+            <a:r>
+              <a:rPr lang="hu-HU" sz="2000" b="1" dirty="0"/>
+              <a:t>Megyeri </a:t>
+            </a:r>
+            <a:r>
+              <a:rPr lang="hu-HU" sz="2000" b="1" dirty="0" err="1"/>
               <a:t>Dikárd</a:t>
             </a:r>
             <a:r>
-              <a:rPr lang="hu-HU" b="1" dirty="0"/>
+              <a:rPr lang="hu-HU" sz="2000" b="1" dirty="0"/>
               <a:t> </a:t>
             </a:r>
             <a:r>
-              <a:rPr lang="hu-HU" b="1" dirty="0" err="1"/>
+              <a:rPr lang="hu-HU" sz="2000" b="1" dirty="0" err="1"/>
               <a:t>Rikárd</a:t>
             </a:r>
             <a:r>
-              <a:rPr lang="hu-HU" b="1" dirty="0"/>
-              <a:t> Richárd, Lassuló </a:t>
-            </a:r>
-            <a:r>
-              <a:rPr lang="hu-HU" b="1" dirty="0" err="1"/>
+              <a:rPr lang="hu-HU" sz="2000" b="1" dirty="0"/>
+              <a:t> Richárd,</a:t>
+            </a:r>
+            <a:br>
+              <a:rPr lang="hu-HU" sz="2000" b="1" dirty="0"/>
+            </a:br>
+            <a:r>
+              <a:rPr lang="hu-HU" sz="2000" b="1" dirty="0"/>
+              <a:t>Lassuló </a:t>
+            </a:r>
+            <a:r>
+              <a:rPr lang="hu-HU" sz="2000" b="1" dirty="0" err="1"/>
               <a:t>Shabbat</a:t>
             </a:r>
             <a:r>
-              <a:rPr lang="hu-HU" b="1" dirty="0"/>
+              <a:rPr lang="hu-HU" sz="2000" b="1" dirty="0"/>
               <a:t> </a:t>
             </a:r>
             <a:r>
-              <a:rPr lang="hu-HU" b="1" dirty="0" err="1"/>
+              <a:rPr lang="hu-HU" sz="2000" b="1" dirty="0" err="1"/>
               <a:t>Shalom</a:t>
             </a:r>
             <a:r>
-              <a:rPr lang="hu-HU" b="1" dirty="0"/>
+              <a:rPr lang="hu-HU" sz="2000" b="1" dirty="0"/>
               <a:t> </a:t>
             </a:r>
             <a:r>
-              <a:rPr lang="hu-HU" b="1" dirty="0" err="1"/>
+              <a:rPr lang="hu-HU" sz="2000" b="1" dirty="0" err="1"/>
               <a:t>Benjámince</a:t>
             </a:r>
-            <a:endParaRPr lang="hu-HU" b="1" dirty="0"/>
+            <a:endParaRPr lang="hu-HU" sz="2000" b="1" dirty="0"/>
           </a:p>
         </p:txBody>
       </p:sp>
@@ -6120,22 +6104,27 @@
             <p:ph type="subTitle" idx="1"/>
           </p:nvPr>
         </p:nvSpPr>
-        <p:spPr/>
+        <p:spPr>
+          <a:xfrm>
+            <a:off x="2692398" y="3657597"/>
+            <a:ext cx="7005275" cy="1515532"/>
+          </a:xfrm>
+        </p:spPr>
         <p:txBody>
           <a:bodyPr>
-            <a:normAutofit fontScale="92500" lnSpcReduction="10000"/>
+            <a:noAutofit/>
           </a:bodyPr>
           <a:lstStyle/>
           <a:p>
             <a:r>
-              <a:rPr lang="hu-HU" b="1" u="none" strike="noStrike" dirty="0">
+              <a:rPr lang="hu-HU" sz="2400" b="1" u="none" strike="noStrike" dirty="0">
                 <a:effectLst/>
                 <a:latin typeface="+mj-lt"/>
               </a:rPr>
               <a:t>Változó:</a:t>
             </a:r>
             <a:r>
-              <a:rPr lang="hu-HU" b="1" dirty="0">
+              <a:rPr lang="hu-HU" sz="2400" b="1" dirty="0">
                 <a:latin typeface="+mj-lt"/>
               </a:rPr>
               <a:t> Olyan memóriatár, aminek az értéke a program futása során bármikor módosítható.</a:t>
@@ -6143,14 +6132,14 @@
           </a:p>
           <a:p>
             <a:r>
-              <a:rPr lang="hu-HU" b="1" u="none" strike="noStrike" dirty="0">
+              <a:rPr lang="hu-HU" sz="2400" b="1" u="none" strike="noStrike" dirty="0">
                 <a:effectLst/>
                 <a:latin typeface="+mj-lt"/>
               </a:rPr>
               <a:t>Konstans:</a:t>
             </a:r>
             <a:r>
-              <a:rPr lang="hu-HU" b="1" dirty="0">
+              <a:rPr lang="hu-HU" sz="2400" b="1" dirty="0">
                 <a:latin typeface="+mj-lt"/>
               </a:rPr>
               <a:t> Egyszer kap értéket, utána módosíthatatlan, fix marad.</a:t>

--- a/RRB_Trump_Epstein_playground_Nagyteteny_ppt2 (1).pptx
+++ b/RRB_Trump_Epstein_playground_Nagyteteny_ppt2 (1).pptx
@@ -6040,6 +6040,266 @@
   <p:clrMapOvr>
     <a:masterClrMapping/>
   </p:clrMapOvr>
+  <mc:AlternateContent xmlns:mc="http://schemas.openxmlformats.org/markup-compatibility/2006">
+    <mc:Choice xmlns:p15="http://schemas.microsoft.com/office/powerpoint/2012/main" Requires="p15">
+      <p:transition xmlns:p14="http://schemas.microsoft.com/office/powerpoint/2010/main" spd="slow" p14:dur="3250">
+        <p15:prstTrans prst="origami"/>
+      </p:transition>
+    </mc:Choice>
+    <mc:Fallback>
+      <p:transition spd="slow">
+        <p:fade/>
+      </p:transition>
+    </mc:Fallback>
+  </mc:AlternateContent>
+  <p:timing>
+    <p:tnLst>
+      <p:par>
+        <p:cTn id="1" dur="indefinite" restart="never" nodeType="tmRoot">
+          <p:childTnLst>
+            <p:seq concurrent="1" nextAc="seek">
+              <p:cTn id="2" dur="indefinite" nodeType="mainSeq">
+                <p:childTnLst>
+                  <p:par>
+                    <p:cTn id="3" fill="hold">
+                      <p:stCondLst>
+                        <p:cond delay="indefinite"/>
+                      </p:stCondLst>
+                      <p:childTnLst>
+                        <p:par>
+                          <p:cTn id="4" fill="hold">
+                            <p:stCondLst>
+                              <p:cond delay="0"/>
+                            </p:stCondLst>
+                            <p:childTnLst>
+                              <p:par>
+                                <p:cTn id="5" presetID="45" presetClass="entr" presetSubtype="0" fill="hold" grpId="0" nodeType="clickEffect">
+                                  <p:stCondLst>
+                                    <p:cond delay="0"/>
+                                  </p:stCondLst>
+                                  <p:childTnLst>
+                                    <p:set>
+                                      <p:cBhvr>
+                                        <p:cTn id="6" dur="1" fill="hold">
+                                          <p:stCondLst>
+                                            <p:cond delay="0"/>
+                                          </p:stCondLst>
+                                        </p:cTn>
+                                        <p:tgtEl>
+                                          <p:spTgt spid="3">
+                                            <p:txEl>
+                                              <p:pRg st="0" end="0"/>
+                                            </p:txEl>
+                                          </p:spTgt>
+                                        </p:tgtEl>
+                                        <p:attrNameLst>
+                                          <p:attrName>style.visibility</p:attrName>
+                                        </p:attrNameLst>
+                                      </p:cBhvr>
+                                      <p:to>
+                                        <p:strVal val="visible"/>
+                                      </p:to>
+                                    </p:set>
+                                    <p:animEffect transition="in" filter="fade">
+                                      <p:cBhvr>
+                                        <p:cTn id="7" dur="2000"/>
+                                        <p:tgtEl>
+                                          <p:spTgt spid="3">
+                                            <p:txEl>
+                                              <p:pRg st="0" end="0"/>
+                                            </p:txEl>
+                                          </p:spTgt>
+                                        </p:tgtEl>
+                                      </p:cBhvr>
+                                    </p:animEffect>
+                                    <p:anim calcmode="lin" valueType="num">
+                                      <p:cBhvr>
+                                        <p:cTn id="8" dur="2000" fill="hold"/>
+                                        <p:tgtEl>
+                                          <p:spTgt spid="3">
+                                            <p:txEl>
+                                              <p:pRg st="0" end="0"/>
+                                            </p:txEl>
+                                          </p:spTgt>
+                                        </p:tgtEl>
+                                        <p:attrNameLst>
+                                          <p:attrName>ppt_w</p:attrName>
+                                        </p:attrNameLst>
+                                      </p:cBhvr>
+                                      <p:tavLst>
+                                        <p:tav tm="0" fmla="#ppt_w*sin(2.5*pi*$)">
+                                          <p:val>
+                                            <p:fltVal val="0"/>
+                                          </p:val>
+                                        </p:tav>
+                                        <p:tav tm="100000">
+                                          <p:val>
+                                            <p:fltVal val="1"/>
+                                          </p:val>
+                                        </p:tav>
+                                      </p:tavLst>
+                                    </p:anim>
+                                    <p:anim calcmode="lin" valueType="num">
+                                      <p:cBhvr>
+                                        <p:cTn id="9" dur="2000" fill="hold"/>
+                                        <p:tgtEl>
+                                          <p:spTgt spid="3">
+                                            <p:txEl>
+                                              <p:pRg st="0" end="0"/>
+                                            </p:txEl>
+                                          </p:spTgt>
+                                        </p:tgtEl>
+                                        <p:attrNameLst>
+                                          <p:attrName>ppt_h</p:attrName>
+                                        </p:attrNameLst>
+                                      </p:cBhvr>
+                                      <p:tavLst>
+                                        <p:tav tm="0">
+                                          <p:val>
+                                            <p:strVal val="#ppt_h"/>
+                                          </p:val>
+                                        </p:tav>
+                                        <p:tav tm="100000">
+                                          <p:val>
+                                            <p:strVal val="#ppt_h"/>
+                                          </p:val>
+                                        </p:tav>
+                                      </p:tavLst>
+                                    </p:anim>
+                                  </p:childTnLst>
+                                </p:cTn>
+                              </p:par>
+                            </p:childTnLst>
+                          </p:cTn>
+                        </p:par>
+                      </p:childTnLst>
+                    </p:cTn>
+                  </p:par>
+                  <p:par>
+                    <p:cTn id="10" fill="hold">
+                      <p:stCondLst>
+                        <p:cond delay="indefinite"/>
+                      </p:stCondLst>
+                      <p:childTnLst>
+                        <p:par>
+                          <p:cTn id="11" fill="hold">
+                            <p:stCondLst>
+                              <p:cond delay="0"/>
+                            </p:stCondLst>
+                            <p:childTnLst>
+                              <p:par>
+                                <p:cTn id="12" presetID="45" presetClass="entr" presetSubtype="0" fill="hold" grpId="0" nodeType="clickEffect">
+                                  <p:stCondLst>
+                                    <p:cond delay="0"/>
+                                  </p:stCondLst>
+                                  <p:childTnLst>
+                                    <p:set>
+                                      <p:cBhvr>
+                                        <p:cTn id="13" dur="1" fill="hold">
+                                          <p:stCondLst>
+                                            <p:cond delay="0"/>
+                                          </p:stCondLst>
+                                        </p:cTn>
+                                        <p:tgtEl>
+                                          <p:spTgt spid="2"/>
+                                        </p:tgtEl>
+                                        <p:attrNameLst>
+                                          <p:attrName>style.visibility</p:attrName>
+                                        </p:attrNameLst>
+                                      </p:cBhvr>
+                                      <p:to>
+                                        <p:strVal val="visible"/>
+                                      </p:to>
+                                    </p:set>
+                                    <p:animEffect transition="in" filter="fade">
+                                      <p:cBhvr>
+                                        <p:cTn id="14" dur="2000"/>
+                                        <p:tgtEl>
+                                          <p:spTgt spid="2"/>
+                                        </p:tgtEl>
+                                      </p:cBhvr>
+                                    </p:animEffect>
+                                    <p:anim calcmode="lin" valueType="num">
+                                      <p:cBhvr>
+                                        <p:cTn id="15" dur="2000" fill="hold"/>
+                                        <p:tgtEl>
+                                          <p:spTgt spid="2"/>
+                                        </p:tgtEl>
+                                        <p:attrNameLst>
+                                          <p:attrName>ppt_w</p:attrName>
+                                        </p:attrNameLst>
+                                      </p:cBhvr>
+                                      <p:tavLst>
+                                        <p:tav tm="0" fmla="#ppt_w*sin(2.5*pi*$)">
+                                          <p:val>
+                                            <p:fltVal val="0"/>
+                                          </p:val>
+                                        </p:tav>
+                                        <p:tav tm="100000">
+                                          <p:val>
+                                            <p:fltVal val="1"/>
+                                          </p:val>
+                                        </p:tav>
+                                      </p:tavLst>
+                                    </p:anim>
+                                    <p:anim calcmode="lin" valueType="num">
+                                      <p:cBhvr>
+                                        <p:cTn id="16" dur="2000" fill="hold"/>
+                                        <p:tgtEl>
+                                          <p:spTgt spid="2"/>
+                                        </p:tgtEl>
+                                        <p:attrNameLst>
+                                          <p:attrName>ppt_h</p:attrName>
+                                        </p:attrNameLst>
+                                      </p:cBhvr>
+                                      <p:tavLst>
+                                        <p:tav tm="0">
+                                          <p:val>
+                                            <p:strVal val="#ppt_h"/>
+                                          </p:val>
+                                        </p:tav>
+                                        <p:tav tm="100000">
+                                          <p:val>
+                                            <p:strVal val="#ppt_h"/>
+                                          </p:val>
+                                        </p:tav>
+                                      </p:tavLst>
+                                    </p:anim>
+                                  </p:childTnLst>
+                                </p:cTn>
+                              </p:par>
+                            </p:childTnLst>
+                          </p:cTn>
+                        </p:par>
+                      </p:childTnLst>
+                    </p:cTn>
+                  </p:par>
+                </p:childTnLst>
+              </p:cTn>
+              <p:prevCondLst>
+                <p:cond evt="onPrev" delay="0">
+                  <p:tgtEl>
+                    <p:sldTgt/>
+                  </p:tgtEl>
+                </p:cond>
+              </p:prevCondLst>
+              <p:nextCondLst>
+                <p:cond evt="onNext" delay="0">
+                  <p:tgtEl>
+                    <p:sldTgt/>
+                  </p:tgtEl>
+                </p:cond>
+              </p:nextCondLst>
+            </p:seq>
+          </p:childTnLst>
+        </p:cTn>
+      </p:par>
+    </p:tnLst>
+    <p:bldLst>
+      <p:bldP spid="2" grpId="0"/>
+      <p:bldP spid="3" grpId="0" build="p"/>
+    </p:bldLst>
+  </p:timing>
 </p:sld>
 </file>
 
@@ -6157,6 +6417,362 @@
   <p:clrMapOvr>
     <a:masterClrMapping/>
   </p:clrMapOvr>
+  <mc:AlternateContent xmlns:mc="http://schemas.openxmlformats.org/markup-compatibility/2006">
+    <mc:Choice xmlns:p15="http://schemas.microsoft.com/office/powerpoint/2012/main" Requires="p15">
+      <p:transition xmlns:p14="http://schemas.microsoft.com/office/powerpoint/2010/main" spd="slow" p14:dur="3250">
+        <p15:prstTrans prst="origami"/>
+      </p:transition>
+    </mc:Choice>
+    <mc:Fallback>
+      <p:transition spd="slow">
+        <p:fade/>
+      </p:transition>
+    </mc:Fallback>
+  </mc:AlternateContent>
+  <p:timing>
+    <p:tnLst>
+      <p:par>
+        <p:cTn id="1" dur="indefinite" restart="never" nodeType="tmRoot">
+          <p:childTnLst>
+            <p:seq concurrent="1" nextAc="seek">
+              <p:cTn id="2" dur="indefinite" nodeType="mainSeq">
+                <p:childTnLst>
+                  <p:par>
+                    <p:cTn id="3" fill="hold">
+                      <p:stCondLst>
+                        <p:cond delay="indefinite"/>
+                      </p:stCondLst>
+                      <p:childTnLst>
+                        <p:par>
+                          <p:cTn id="4" fill="hold">
+                            <p:stCondLst>
+                              <p:cond delay="0"/>
+                            </p:stCondLst>
+                            <p:childTnLst>
+                              <p:par>
+                                <p:cTn id="5" presetID="45" presetClass="entr" presetSubtype="0" fill="hold" grpId="0" nodeType="clickEffect">
+                                  <p:stCondLst>
+                                    <p:cond delay="0"/>
+                                  </p:stCondLst>
+                                  <p:childTnLst>
+                                    <p:set>
+                                      <p:cBhvr>
+                                        <p:cTn id="6" dur="1" fill="hold">
+                                          <p:stCondLst>
+                                            <p:cond delay="0"/>
+                                          </p:stCondLst>
+                                        </p:cTn>
+                                        <p:tgtEl>
+                                          <p:spTgt spid="2"/>
+                                        </p:tgtEl>
+                                        <p:attrNameLst>
+                                          <p:attrName>style.visibility</p:attrName>
+                                        </p:attrNameLst>
+                                      </p:cBhvr>
+                                      <p:to>
+                                        <p:strVal val="visible"/>
+                                      </p:to>
+                                    </p:set>
+                                    <p:animEffect transition="in" filter="fade">
+                                      <p:cBhvr>
+                                        <p:cTn id="7" dur="2000"/>
+                                        <p:tgtEl>
+                                          <p:spTgt spid="2"/>
+                                        </p:tgtEl>
+                                      </p:cBhvr>
+                                    </p:animEffect>
+                                    <p:anim calcmode="lin" valueType="num">
+                                      <p:cBhvr>
+                                        <p:cTn id="8" dur="2000" fill="hold"/>
+                                        <p:tgtEl>
+                                          <p:spTgt spid="2"/>
+                                        </p:tgtEl>
+                                        <p:attrNameLst>
+                                          <p:attrName>ppt_w</p:attrName>
+                                        </p:attrNameLst>
+                                      </p:cBhvr>
+                                      <p:tavLst>
+                                        <p:tav tm="0" fmla="#ppt_w*sin(2.5*pi*$)">
+                                          <p:val>
+                                            <p:fltVal val="0"/>
+                                          </p:val>
+                                        </p:tav>
+                                        <p:tav tm="100000">
+                                          <p:val>
+                                            <p:fltVal val="1"/>
+                                          </p:val>
+                                        </p:tav>
+                                      </p:tavLst>
+                                    </p:anim>
+                                    <p:anim calcmode="lin" valueType="num">
+                                      <p:cBhvr>
+                                        <p:cTn id="9" dur="2000" fill="hold"/>
+                                        <p:tgtEl>
+                                          <p:spTgt spid="2"/>
+                                        </p:tgtEl>
+                                        <p:attrNameLst>
+                                          <p:attrName>ppt_h</p:attrName>
+                                        </p:attrNameLst>
+                                      </p:cBhvr>
+                                      <p:tavLst>
+                                        <p:tav tm="0">
+                                          <p:val>
+                                            <p:strVal val="#ppt_h"/>
+                                          </p:val>
+                                        </p:tav>
+                                        <p:tav tm="100000">
+                                          <p:val>
+                                            <p:strVal val="#ppt_h"/>
+                                          </p:val>
+                                        </p:tav>
+                                      </p:tavLst>
+                                    </p:anim>
+                                  </p:childTnLst>
+                                </p:cTn>
+                              </p:par>
+                            </p:childTnLst>
+                          </p:cTn>
+                        </p:par>
+                      </p:childTnLst>
+                    </p:cTn>
+                  </p:par>
+                  <p:par>
+                    <p:cTn id="10" fill="hold">
+                      <p:stCondLst>
+                        <p:cond delay="indefinite"/>
+                      </p:stCondLst>
+                      <p:childTnLst>
+                        <p:par>
+                          <p:cTn id="11" fill="hold">
+                            <p:stCondLst>
+                              <p:cond delay="0"/>
+                            </p:stCondLst>
+                            <p:childTnLst>
+                              <p:par>
+                                <p:cTn id="12" presetID="45" presetClass="entr" presetSubtype="0" fill="hold" nodeType="clickEffect">
+                                  <p:stCondLst>
+                                    <p:cond delay="0"/>
+                                  </p:stCondLst>
+                                  <p:childTnLst>
+                                    <p:set>
+                                      <p:cBhvr>
+                                        <p:cTn id="13" dur="1" fill="hold">
+                                          <p:stCondLst>
+                                            <p:cond delay="0"/>
+                                          </p:stCondLst>
+                                        </p:cTn>
+                                        <p:tgtEl>
+                                          <p:spTgt spid="3">
+                                            <p:txEl>
+                                              <p:pRg st="0" end="0"/>
+                                            </p:txEl>
+                                          </p:spTgt>
+                                        </p:tgtEl>
+                                        <p:attrNameLst>
+                                          <p:attrName>style.visibility</p:attrName>
+                                        </p:attrNameLst>
+                                      </p:cBhvr>
+                                      <p:to>
+                                        <p:strVal val="visible"/>
+                                      </p:to>
+                                    </p:set>
+                                    <p:animEffect transition="in" filter="fade">
+                                      <p:cBhvr>
+                                        <p:cTn id="14" dur="2000"/>
+                                        <p:tgtEl>
+                                          <p:spTgt spid="3">
+                                            <p:txEl>
+                                              <p:pRg st="0" end="0"/>
+                                            </p:txEl>
+                                          </p:spTgt>
+                                        </p:tgtEl>
+                                      </p:cBhvr>
+                                    </p:animEffect>
+                                    <p:anim calcmode="lin" valueType="num">
+                                      <p:cBhvr>
+                                        <p:cTn id="15" dur="2000" fill="hold"/>
+                                        <p:tgtEl>
+                                          <p:spTgt spid="3">
+                                            <p:txEl>
+                                              <p:pRg st="0" end="0"/>
+                                            </p:txEl>
+                                          </p:spTgt>
+                                        </p:tgtEl>
+                                        <p:attrNameLst>
+                                          <p:attrName>ppt_w</p:attrName>
+                                        </p:attrNameLst>
+                                      </p:cBhvr>
+                                      <p:tavLst>
+                                        <p:tav tm="0" fmla="#ppt_w*sin(2.5*pi*$)">
+                                          <p:val>
+                                            <p:fltVal val="0"/>
+                                          </p:val>
+                                        </p:tav>
+                                        <p:tav tm="100000">
+                                          <p:val>
+                                            <p:fltVal val="1"/>
+                                          </p:val>
+                                        </p:tav>
+                                      </p:tavLst>
+                                    </p:anim>
+                                    <p:anim calcmode="lin" valueType="num">
+                                      <p:cBhvr>
+                                        <p:cTn id="16" dur="2000" fill="hold"/>
+                                        <p:tgtEl>
+                                          <p:spTgt spid="3">
+                                            <p:txEl>
+                                              <p:pRg st="0" end="0"/>
+                                            </p:txEl>
+                                          </p:spTgt>
+                                        </p:tgtEl>
+                                        <p:attrNameLst>
+                                          <p:attrName>ppt_h</p:attrName>
+                                        </p:attrNameLst>
+                                      </p:cBhvr>
+                                      <p:tavLst>
+                                        <p:tav tm="0">
+                                          <p:val>
+                                            <p:strVal val="#ppt_h"/>
+                                          </p:val>
+                                        </p:tav>
+                                        <p:tav tm="100000">
+                                          <p:val>
+                                            <p:strVal val="#ppt_h"/>
+                                          </p:val>
+                                        </p:tav>
+                                      </p:tavLst>
+                                    </p:anim>
+                                  </p:childTnLst>
+                                </p:cTn>
+                              </p:par>
+                              <p:par>
+                                <p:cTn id="17" presetID="45" presetClass="entr" presetSubtype="0" fill="hold" nodeType="withEffect">
+                                  <p:stCondLst>
+                                    <p:cond delay="0"/>
+                                  </p:stCondLst>
+                                  <p:childTnLst>
+                                    <p:set>
+                                      <p:cBhvr>
+                                        <p:cTn id="18" dur="1" fill="hold">
+                                          <p:stCondLst>
+                                            <p:cond delay="0"/>
+                                          </p:stCondLst>
+                                        </p:cTn>
+                                        <p:tgtEl>
+                                          <p:spTgt spid="3">
+                                            <p:txEl>
+                                              <p:pRg st="1" end="1"/>
+                                            </p:txEl>
+                                          </p:spTgt>
+                                        </p:tgtEl>
+                                        <p:attrNameLst>
+                                          <p:attrName>style.visibility</p:attrName>
+                                        </p:attrNameLst>
+                                      </p:cBhvr>
+                                      <p:to>
+                                        <p:strVal val="visible"/>
+                                      </p:to>
+                                    </p:set>
+                                    <p:animEffect transition="in" filter="fade">
+                                      <p:cBhvr>
+                                        <p:cTn id="19" dur="2000"/>
+                                        <p:tgtEl>
+                                          <p:spTgt spid="3">
+                                            <p:txEl>
+                                              <p:pRg st="1" end="1"/>
+                                            </p:txEl>
+                                          </p:spTgt>
+                                        </p:tgtEl>
+                                      </p:cBhvr>
+                                    </p:animEffect>
+                                    <p:anim calcmode="lin" valueType="num">
+                                      <p:cBhvr>
+                                        <p:cTn id="20" dur="2000" fill="hold"/>
+                                        <p:tgtEl>
+                                          <p:spTgt spid="3">
+                                            <p:txEl>
+                                              <p:pRg st="1" end="1"/>
+                                            </p:txEl>
+                                          </p:spTgt>
+                                        </p:tgtEl>
+                                        <p:attrNameLst>
+                                          <p:attrName>ppt_w</p:attrName>
+                                        </p:attrNameLst>
+                                      </p:cBhvr>
+                                      <p:tavLst>
+                                        <p:tav tm="0" fmla="#ppt_w*sin(2.5*pi*$)">
+                                          <p:val>
+                                            <p:fltVal val="0"/>
+                                          </p:val>
+                                        </p:tav>
+                                        <p:tav tm="100000">
+                                          <p:val>
+                                            <p:fltVal val="1"/>
+                                          </p:val>
+                                        </p:tav>
+                                      </p:tavLst>
+                                    </p:anim>
+                                    <p:anim calcmode="lin" valueType="num">
+                                      <p:cBhvr>
+                                        <p:cTn id="21" dur="2000" fill="hold"/>
+                                        <p:tgtEl>
+                                          <p:spTgt spid="3">
+                                            <p:txEl>
+                                              <p:pRg st="1" end="1"/>
+                                            </p:txEl>
+                                          </p:spTgt>
+                                        </p:tgtEl>
+                                        <p:attrNameLst>
+                                          <p:attrName>ppt_h</p:attrName>
+                                        </p:attrNameLst>
+                                      </p:cBhvr>
+                                      <p:tavLst>
+                                        <p:tav tm="0">
+                                          <p:val>
+                                            <p:strVal val="#ppt_h"/>
+                                          </p:val>
+                                        </p:tav>
+                                        <p:tav tm="100000">
+                                          <p:val>
+                                            <p:strVal val="#ppt_h"/>
+                                          </p:val>
+                                        </p:tav>
+                                      </p:tavLst>
+                                    </p:anim>
+                                  </p:childTnLst>
+                                </p:cTn>
+                              </p:par>
+                            </p:childTnLst>
+                          </p:cTn>
+                        </p:par>
+                      </p:childTnLst>
+                    </p:cTn>
+                  </p:par>
+                </p:childTnLst>
+              </p:cTn>
+              <p:prevCondLst>
+                <p:cond evt="onPrev" delay="0">
+                  <p:tgtEl>
+                    <p:sldTgt/>
+                  </p:tgtEl>
+                </p:cond>
+              </p:prevCondLst>
+              <p:nextCondLst>
+                <p:cond evt="onNext" delay="0">
+                  <p:tgtEl>
+                    <p:sldTgt/>
+                  </p:tgtEl>
+                </p:cond>
+              </p:nextCondLst>
+            </p:seq>
+          </p:childTnLst>
+        </p:cTn>
+      </p:par>
+    </p:tnLst>
+    <p:bldLst>
+      <p:bldP spid="2" grpId="0"/>
+    </p:bldLst>
+  </p:timing>
 </p:sld>
 </file>
 
@@ -6283,6 +6899,150 @@
   <p:clrMapOvr>
     <a:masterClrMapping/>
   </p:clrMapOvr>
+  <mc:AlternateContent xmlns:mc="http://schemas.openxmlformats.org/markup-compatibility/2006">
+    <mc:Choice xmlns:p15="http://schemas.microsoft.com/office/powerpoint/2012/main" Requires="p15">
+      <p:transition xmlns:p14="http://schemas.microsoft.com/office/powerpoint/2010/main" spd="slow" p14:dur="3250">
+        <p15:prstTrans prst="origami"/>
+      </p:transition>
+    </mc:Choice>
+    <mc:Fallback>
+      <p:transition spd="slow">
+        <p:fade/>
+      </p:transition>
+    </mc:Fallback>
+  </mc:AlternateContent>
+  <p:timing>
+    <p:tnLst>
+      <p:par>
+        <p:cTn id="1" dur="indefinite" restart="never" nodeType="tmRoot">
+          <p:childTnLst>
+            <p:seq concurrent="1" nextAc="seek">
+              <p:cTn id="2" dur="indefinite" nodeType="mainSeq">
+                <p:childTnLst>
+                  <p:par>
+                    <p:cTn id="3" fill="hold">
+                      <p:stCondLst>
+                        <p:cond delay="indefinite"/>
+                      </p:stCondLst>
+                      <p:childTnLst>
+                        <p:par>
+                          <p:cTn id="4" fill="hold">
+                            <p:stCondLst>
+                              <p:cond delay="0"/>
+                            </p:stCondLst>
+                            <p:childTnLst>
+                              <p:par>
+                                <p:cTn id="5" presetID="45" presetClass="entr" presetSubtype="0" fill="hold" grpId="0" nodeType="clickEffect">
+                                  <p:stCondLst>
+                                    <p:cond delay="0"/>
+                                  </p:stCondLst>
+                                  <p:childTnLst>
+                                    <p:set>
+                                      <p:cBhvr>
+                                        <p:cTn id="6" dur="1" fill="hold">
+                                          <p:stCondLst>
+                                            <p:cond delay="0"/>
+                                          </p:stCondLst>
+                                        </p:cTn>
+                                        <p:tgtEl>
+                                          <p:spTgt spid="2"/>
+                                        </p:tgtEl>
+                                        <p:attrNameLst>
+                                          <p:attrName>style.visibility</p:attrName>
+                                        </p:attrNameLst>
+                                      </p:cBhvr>
+                                      <p:to>
+                                        <p:strVal val="visible"/>
+                                      </p:to>
+                                    </p:set>
+                                    <p:animEffect transition="in" filter="fade">
+                                      <p:cBhvr>
+                                        <p:cTn id="7" dur="2000"/>
+                                        <p:tgtEl>
+                                          <p:spTgt spid="2"/>
+                                        </p:tgtEl>
+                                      </p:cBhvr>
+                                    </p:animEffect>
+                                    <p:anim calcmode="lin" valueType="num">
+                                      <p:cBhvr>
+                                        <p:cTn id="8" dur="2000" fill="hold"/>
+                                        <p:tgtEl>
+                                          <p:spTgt spid="2"/>
+                                        </p:tgtEl>
+                                        <p:attrNameLst>
+                                          <p:attrName>ppt_w</p:attrName>
+                                        </p:attrNameLst>
+                                      </p:cBhvr>
+                                      <p:tavLst>
+                                        <p:tav tm="0" fmla="#ppt_w*sin(2.5*pi*$)">
+                                          <p:val>
+                                            <p:fltVal val="0"/>
+                                          </p:val>
+                                        </p:tav>
+                                        <p:tav tm="100000">
+                                          <p:val>
+                                            <p:fltVal val="1"/>
+                                          </p:val>
+                                        </p:tav>
+                                      </p:tavLst>
+                                    </p:anim>
+                                    <p:anim calcmode="lin" valueType="num">
+                                      <p:cBhvr>
+                                        <p:cTn id="9" dur="2000" fill="hold"/>
+                                        <p:tgtEl>
+                                          <p:spTgt spid="2"/>
+                                        </p:tgtEl>
+                                        <p:attrNameLst>
+                                          <p:attrName>ppt_h</p:attrName>
+                                        </p:attrNameLst>
+                                      </p:cBhvr>
+                                      <p:tavLst>
+                                        <p:tav tm="0">
+                                          <p:val>
+                                            <p:strVal val="#ppt_h"/>
+                                          </p:val>
+                                        </p:tav>
+                                        <p:tav tm="100000">
+                                          <p:val>
+                                            <p:strVal val="#ppt_h"/>
+                                          </p:val>
+                                        </p:tav>
+                                      </p:tavLst>
+                                    </p:anim>
+                                  </p:childTnLst>
+                                </p:cTn>
+                              </p:par>
+                            </p:childTnLst>
+                          </p:cTn>
+                        </p:par>
+                      </p:childTnLst>
+                    </p:cTn>
+                  </p:par>
+                </p:childTnLst>
+              </p:cTn>
+              <p:prevCondLst>
+                <p:cond evt="onPrev" delay="0">
+                  <p:tgtEl>
+                    <p:sldTgt/>
+                  </p:tgtEl>
+                </p:cond>
+              </p:prevCondLst>
+              <p:nextCondLst>
+                <p:cond evt="onNext" delay="0">
+                  <p:tgtEl>
+                    <p:sldTgt/>
+                  </p:tgtEl>
+                </p:cond>
+              </p:nextCondLst>
+            </p:seq>
+          </p:childTnLst>
+        </p:cTn>
+      </p:par>
+    </p:tnLst>
+    <p:bldLst>
+      <p:bldP spid="2" grpId="0"/>
+    </p:bldLst>
+  </p:timing>
 </p:sld>
 </file>
 
@@ -6409,6 +7169,648 @@
   <p:clrMapOvr>
     <a:masterClrMapping/>
   </p:clrMapOvr>
+  <mc:AlternateContent xmlns:mc="http://schemas.openxmlformats.org/markup-compatibility/2006">
+    <mc:Choice xmlns:p15="http://schemas.microsoft.com/office/powerpoint/2012/main" Requires="p15">
+      <p:transition xmlns:p14="http://schemas.microsoft.com/office/powerpoint/2010/main" spd="slow" p14:dur="3250">
+        <p15:prstTrans prst="origami"/>
+      </p:transition>
+    </mc:Choice>
+    <mc:Fallback>
+      <p:transition spd="slow">
+        <p:fade/>
+      </p:transition>
+    </mc:Fallback>
+  </mc:AlternateContent>
+  <p:timing>
+    <p:tnLst>
+      <p:par>
+        <p:cTn id="1" dur="indefinite" restart="never" nodeType="tmRoot">
+          <p:childTnLst>
+            <p:seq concurrent="1" nextAc="seek">
+              <p:cTn id="2" dur="indefinite" nodeType="mainSeq">
+                <p:childTnLst>
+                  <p:par>
+                    <p:cTn id="3" fill="hold">
+                      <p:stCondLst>
+                        <p:cond delay="indefinite"/>
+                      </p:stCondLst>
+                      <p:childTnLst>
+                        <p:par>
+                          <p:cTn id="4" fill="hold">
+                            <p:stCondLst>
+                              <p:cond delay="0"/>
+                            </p:stCondLst>
+                            <p:childTnLst>
+                              <p:par>
+                                <p:cTn id="5" presetID="45" presetClass="entr" presetSubtype="0" fill="hold" grpId="0" nodeType="clickEffect">
+                                  <p:stCondLst>
+                                    <p:cond delay="0"/>
+                                  </p:stCondLst>
+                                  <p:childTnLst>
+                                    <p:set>
+                                      <p:cBhvr>
+                                        <p:cTn id="6" dur="1" fill="hold">
+                                          <p:stCondLst>
+                                            <p:cond delay="0"/>
+                                          </p:stCondLst>
+                                        </p:cTn>
+                                        <p:tgtEl>
+                                          <p:spTgt spid="2"/>
+                                        </p:tgtEl>
+                                        <p:attrNameLst>
+                                          <p:attrName>style.visibility</p:attrName>
+                                        </p:attrNameLst>
+                                      </p:cBhvr>
+                                      <p:to>
+                                        <p:strVal val="visible"/>
+                                      </p:to>
+                                    </p:set>
+                                    <p:animEffect transition="in" filter="fade">
+                                      <p:cBhvr>
+                                        <p:cTn id="7" dur="2000"/>
+                                        <p:tgtEl>
+                                          <p:spTgt spid="2"/>
+                                        </p:tgtEl>
+                                      </p:cBhvr>
+                                    </p:animEffect>
+                                    <p:anim calcmode="lin" valueType="num">
+                                      <p:cBhvr>
+                                        <p:cTn id="8" dur="2000" fill="hold"/>
+                                        <p:tgtEl>
+                                          <p:spTgt spid="2"/>
+                                        </p:tgtEl>
+                                        <p:attrNameLst>
+                                          <p:attrName>ppt_w</p:attrName>
+                                        </p:attrNameLst>
+                                      </p:cBhvr>
+                                      <p:tavLst>
+                                        <p:tav tm="0" fmla="#ppt_w*sin(2.5*pi*$)">
+                                          <p:val>
+                                            <p:fltVal val="0"/>
+                                          </p:val>
+                                        </p:tav>
+                                        <p:tav tm="100000">
+                                          <p:val>
+                                            <p:fltVal val="1"/>
+                                          </p:val>
+                                        </p:tav>
+                                      </p:tavLst>
+                                    </p:anim>
+                                    <p:anim calcmode="lin" valueType="num">
+                                      <p:cBhvr>
+                                        <p:cTn id="9" dur="2000" fill="hold"/>
+                                        <p:tgtEl>
+                                          <p:spTgt spid="2"/>
+                                        </p:tgtEl>
+                                        <p:attrNameLst>
+                                          <p:attrName>ppt_h</p:attrName>
+                                        </p:attrNameLst>
+                                      </p:cBhvr>
+                                      <p:tavLst>
+                                        <p:tav tm="0">
+                                          <p:val>
+                                            <p:strVal val="#ppt_h"/>
+                                          </p:val>
+                                        </p:tav>
+                                        <p:tav tm="100000">
+                                          <p:val>
+                                            <p:strVal val="#ppt_h"/>
+                                          </p:val>
+                                        </p:tav>
+                                      </p:tavLst>
+                                    </p:anim>
+                                  </p:childTnLst>
+                                </p:cTn>
+                              </p:par>
+                            </p:childTnLst>
+                          </p:cTn>
+                        </p:par>
+                      </p:childTnLst>
+                    </p:cTn>
+                  </p:par>
+                  <p:par>
+                    <p:cTn id="10" fill="hold">
+                      <p:stCondLst>
+                        <p:cond delay="indefinite"/>
+                      </p:stCondLst>
+                      <p:childTnLst>
+                        <p:par>
+                          <p:cTn id="11" fill="hold">
+                            <p:stCondLst>
+                              <p:cond delay="0"/>
+                            </p:stCondLst>
+                            <p:childTnLst>
+                              <p:par>
+                                <p:cTn id="12" presetID="31" presetClass="entr" presetSubtype="0" fill="hold" nodeType="clickEffect">
+                                  <p:stCondLst>
+                                    <p:cond delay="0"/>
+                                  </p:stCondLst>
+                                  <p:childTnLst>
+                                    <p:set>
+                                      <p:cBhvr>
+                                        <p:cTn id="13" dur="1" fill="hold">
+                                          <p:stCondLst>
+                                            <p:cond delay="0"/>
+                                          </p:stCondLst>
+                                        </p:cTn>
+                                        <p:tgtEl>
+                                          <p:spTgt spid="3">
+                                            <p:txEl>
+                                              <p:pRg st="0" end="0"/>
+                                            </p:txEl>
+                                          </p:spTgt>
+                                        </p:tgtEl>
+                                        <p:attrNameLst>
+                                          <p:attrName>style.visibility</p:attrName>
+                                        </p:attrNameLst>
+                                      </p:cBhvr>
+                                      <p:to>
+                                        <p:strVal val="visible"/>
+                                      </p:to>
+                                    </p:set>
+                                    <p:anim calcmode="lin" valueType="num">
+                                      <p:cBhvr>
+                                        <p:cTn id="14" dur="1000" fill="hold"/>
+                                        <p:tgtEl>
+                                          <p:spTgt spid="3">
+                                            <p:txEl>
+                                              <p:pRg st="0" end="0"/>
+                                            </p:txEl>
+                                          </p:spTgt>
+                                        </p:tgtEl>
+                                        <p:attrNameLst>
+                                          <p:attrName>ppt_w</p:attrName>
+                                        </p:attrNameLst>
+                                      </p:cBhvr>
+                                      <p:tavLst>
+                                        <p:tav tm="0">
+                                          <p:val>
+                                            <p:fltVal val="0"/>
+                                          </p:val>
+                                        </p:tav>
+                                        <p:tav tm="100000">
+                                          <p:val>
+                                            <p:strVal val="#ppt_w"/>
+                                          </p:val>
+                                        </p:tav>
+                                      </p:tavLst>
+                                    </p:anim>
+                                    <p:anim calcmode="lin" valueType="num">
+                                      <p:cBhvr>
+                                        <p:cTn id="15" dur="1000" fill="hold"/>
+                                        <p:tgtEl>
+                                          <p:spTgt spid="3">
+                                            <p:txEl>
+                                              <p:pRg st="0" end="0"/>
+                                            </p:txEl>
+                                          </p:spTgt>
+                                        </p:tgtEl>
+                                        <p:attrNameLst>
+                                          <p:attrName>ppt_h</p:attrName>
+                                        </p:attrNameLst>
+                                      </p:cBhvr>
+                                      <p:tavLst>
+                                        <p:tav tm="0">
+                                          <p:val>
+                                            <p:fltVal val="0"/>
+                                          </p:val>
+                                        </p:tav>
+                                        <p:tav tm="100000">
+                                          <p:val>
+                                            <p:strVal val="#ppt_h"/>
+                                          </p:val>
+                                        </p:tav>
+                                      </p:tavLst>
+                                    </p:anim>
+                                    <p:anim calcmode="lin" valueType="num">
+                                      <p:cBhvr>
+                                        <p:cTn id="16" dur="1000" fill="hold"/>
+                                        <p:tgtEl>
+                                          <p:spTgt spid="3">
+                                            <p:txEl>
+                                              <p:pRg st="0" end="0"/>
+                                            </p:txEl>
+                                          </p:spTgt>
+                                        </p:tgtEl>
+                                        <p:attrNameLst>
+                                          <p:attrName>style.rotation</p:attrName>
+                                        </p:attrNameLst>
+                                      </p:cBhvr>
+                                      <p:tavLst>
+                                        <p:tav tm="0">
+                                          <p:val>
+                                            <p:fltVal val="90"/>
+                                          </p:val>
+                                        </p:tav>
+                                        <p:tav tm="100000">
+                                          <p:val>
+                                            <p:fltVal val="0"/>
+                                          </p:val>
+                                        </p:tav>
+                                      </p:tavLst>
+                                    </p:anim>
+                                    <p:animEffect transition="in" filter="fade">
+                                      <p:cBhvr>
+                                        <p:cTn id="17" dur="1000"/>
+                                        <p:tgtEl>
+                                          <p:spTgt spid="3">
+                                            <p:txEl>
+                                              <p:pRg st="0" end="0"/>
+                                            </p:txEl>
+                                          </p:spTgt>
+                                        </p:tgtEl>
+                                      </p:cBhvr>
+                                    </p:animEffect>
+                                  </p:childTnLst>
+                                </p:cTn>
+                              </p:par>
+                            </p:childTnLst>
+                          </p:cTn>
+                        </p:par>
+                      </p:childTnLst>
+                    </p:cTn>
+                  </p:par>
+                  <p:par>
+                    <p:cTn id="18" fill="hold">
+                      <p:stCondLst>
+                        <p:cond delay="indefinite"/>
+                      </p:stCondLst>
+                      <p:childTnLst>
+                        <p:par>
+                          <p:cTn id="19" fill="hold">
+                            <p:stCondLst>
+                              <p:cond delay="0"/>
+                            </p:stCondLst>
+                            <p:childTnLst>
+                              <p:par>
+                                <p:cTn id="20" presetID="26" presetClass="entr" presetSubtype="0" fill="hold" nodeType="clickEffect">
+                                  <p:stCondLst>
+                                    <p:cond delay="0"/>
+                                  </p:stCondLst>
+                                  <p:childTnLst>
+                                    <p:set>
+                                      <p:cBhvr>
+                                        <p:cTn id="21" dur="1" fill="hold">
+                                          <p:stCondLst>
+                                            <p:cond delay="0"/>
+                                          </p:stCondLst>
+                                        </p:cTn>
+                                        <p:tgtEl>
+                                          <p:spTgt spid="3">
+                                            <p:txEl>
+                                              <p:pRg st="1" end="1"/>
+                                            </p:txEl>
+                                          </p:spTgt>
+                                        </p:tgtEl>
+                                        <p:attrNameLst>
+                                          <p:attrName>style.visibility</p:attrName>
+                                        </p:attrNameLst>
+                                      </p:cBhvr>
+                                      <p:to>
+                                        <p:strVal val="visible"/>
+                                      </p:to>
+                                    </p:set>
+                                    <p:animEffect transition="in" filter="wipe(down)">
+                                      <p:cBhvr>
+                                        <p:cTn id="22" dur="580">
+                                          <p:stCondLst>
+                                            <p:cond delay="0"/>
+                                          </p:stCondLst>
+                                        </p:cTn>
+                                        <p:tgtEl>
+                                          <p:spTgt spid="3">
+                                            <p:txEl>
+                                              <p:pRg st="1" end="1"/>
+                                            </p:txEl>
+                                          </p:spTgt>
+                                        </p:tgtEl>
+                                      </p:cBhvr>
+                                    </p:animEffect>
+                                    <p:anim calcmode="lin" valueType="num">
+                                      <p:cBhvr>
+                                        <p:cTn id="23" dur="1822" tmFilter="0,0; 0.14,0.36; 0.43,0.73; 0.71,0.91; 1.0,1.0">
+                                          <p:stCondLst>
+                                            <p:cond delay="0"/>
+                                          </p:stCondLst>
+                                        </p:cTn>
+                                        <p:tgtEl>
+                                          <p:spTgt spid="3">
+                                            <p:txEl>
+                                              <p:pRg st="1" end="1"/>
+                                            </p:txEl>
+                                          </p:spTgt>
+                                        </p:tgtEl>
+                                        <p:attrNameLst>
+                                          <p:attrName>ppt_x</p:attrName>
+                                        </p:attrNameLst>
+                                      </p:cBhvr>
+                                      <p:tavLst>
+                                        <p:tav tm="0">
+                                          <p:val>
+                                            <p:strVal val="#ppt_x-0.25"/>
+                                          </p:val>
+                                        </p:tav>
+                                        <p:tav tm="100000">
+                                          <p:val>
+                                            <p:strVal val="#ppt_x"/>
+                                          </p:val>
+                                        </p:tav>
+                                      </p:tavLst>
+                                    </p:anim>
+                                    <p:anim calcmode="lin" valueType="num">
+                                      <p:cBhvr>
+                                        <p:cTn id="24" dur="664" tmFilter="0.0,0.0; 0.25,0.07; 0.50,0.2; 0.75,0.467; 1.0,1.0">
+                                          <p:stCondLst>
+                                            <p:cond delay="0"/>
+                                          </p:stCondLst>
+                                        </p:cTn>
+                                        <p:tgtEl>
+                                          <p:spTgt spid="3">
+                                            <p:txEl>
+                                              <p:pRg st="1" end="1"/>
+                                            </p:txEl>
+                                          </p:spTgt>
+                                        </p:tgtEl>
+                                        <p:attrNameLst>
+                                          <p:attrName>ppt_y</p:attrName>
+                                        </p:attrNameLst>
+                                      </p:cBhvr>
+                                      <p:tavLst>
+                                        <p:tav tm="0" fmla="#ppt_y-sin(pi*$)/3">
+                                          <p:val>
+                                            <p:fltVal val="0.5"/>
+                                          </p:val>
+                                        </p:tav>
+                                        <p:tav tm="100000">
+                                          <p:val>
+                                            <p:fltVal val="1"/>
+                                          </p:val>
+                                        </p:tav>
+                                      </p:tavLst>
+                                    </p:anim>
+                                    <p:anim calcmode="lin" valueType="num">
+                                      <p:cBhvr>
+                                        <p:cTn id="25" dur="664" tmFilter="0, 0; 0.125,0.2665; 0.25,0.4; 0.375,0.465; 0.5,0.5;  0.625,0.535; 0.75,0.6; 0.875,0.7335; 1,1">
+                                          <p:stCondLst>
+                                            <p:cond delay="664"/>
+                                          </p:stCondLst>
+                                        </p:cTn>
+                                        <p:tgtEl>
+                                          <p:spTgt spid="3">
+                                            <p:txEl>
+                                              <p:pRg st="1" end="1"/>
+                                            </p:txEl>
+                                          </p:spTgt>
+                                        </p:tgtEl>
+                                        <p:attrNameLst>
+                                          <p:attrName>ppt_y</p:attrName>
+                                        </p:attrNameLst>
+                                      </p:cBhvr>
+                                      <p:tavLst>
+                                        <p:tav tm="0" fmla="#ppt_y-sin(pi*$)/9">
+                                          <p:val>
+                                            <p:fltVal val="0"/>
+                                          </p:val>
+                                        </p:tav>
+                                        <p:tav tm="100000">
+                                          <p:val>
+                                            <p:fltVal val="1"/>
+                                          </p:val>
+                                        </p:tav>
+                                      </p:tavLst>
+                                    </p:anim>
+                                    <p:anim calcmode="lin" valueType="num">
+                                      <p:cBhvr>
+                                        <p:cTn id="26" dur="332" tmFilter="0, 0; 0.125,0.2665; 0.25,0.4; 0.375,0.465; 0.5,0.5;  0.625,0.535; 0.75,0.6; 0.875,0.7335; 1,1">
+                                          <p:stCondLst>
+                                            <p:cond delay="1324"/>
+                                          </p:stCondLst>
+                                        </p:cTn>
+                                        <p:tgtEl>
+                                          <p:spTgt spid="3">
+                                            <p:txEl>
+                                              <p:pRg st="1" end="1"/>
+                                            </p:txEl>
+                                          </p:spTgt>
+                                        </p:tgtEl>
+                                        <p:attrNameLst>
+                                          <p:attrName>ppt_y</p:attrName>
+                                        </p:attrNameLst>
+                                      </p:cBhvr>
+                                      <p:tavLst>
+                                        <p:tav tm="0" fmla="#ppt_y-sin(pi*$)/27">
+                                          <p:val>
+                                            <p:fltVal val="0"/>
+                                          </p:val>
+                                        </p:tav>
+                                        <p:tav tm="100000">
+                                          <p:val>
+                                            <p:fltVal val="1"/>
+                                          </p:val>
+                                        </p:tav>
+                                      </p:tavLst>
+                                    </p:anim>
+                                    <p:anim calcmode="lin" valueType="num">
+                                      <p:cBhvr>
+                                        <p:cTn id="27" dur="164" tmFilter="0, 0; 0.125,0.2665; 0.25,0.4; 0.375,0.465; 0.5,0.5;  0.625,0.535; 0.75,0.6; 0.875,0.7335; 1,1">
+                                          <p:stCondLst>
+                                            <p:cond delay="1656"/>
+                                          </p:stCondLst>
+                                        </p:cTn>
+                                        <p:tgtEl>
+                                          <p:spTgt spid="3">
+                                            <p:txEl>
+                                              <p:pRg st="1" end="1"/>
+                                            </p:txEl>
+                                          </p:spTgt>
+                                        </p:tgtEl>
+                                        <p:attrNameLst>
+                                          <p:attrName>ppt_y</p:attrName>
+                                        </p:attrNameLst>
+                                      </p:cBhvr>
+                                      <p:tavLst>
+                                        <p:tav tm="0" fmla="#ppt_y-sin(pi*$)/81">
+                                          <p:val>
+                                            <p:fltVal val="0"/>
+                                          </p:val>
+                                        </p:tav>
+                                        <p:tav tm="100000">
+                                          <p:val>
+                                            <p:fltVal val="1"/>
+                                          </p:val>
+                                        </p:tav>
+                                      </p:tavLst>
+                                    </p:anim>
+                                    <p:animScale>
+                                      <p:cBhvr>
+                                        <p:cTn id="28" dur="26">
+                                          <p:stCondLst>
+                                            <p:cond delay="650"/>
+                                          </p:stCondLst>
+                                        </p:cTn>
+                                        <p:tgtEl>
+                                          <p:spTgt spid="3">
+                                            <p:txEl>
+                                              <p:pRg st="1" end="1"/>
+                                            </p:txEl>
+                                          </p:spTgt>
+                                        </p:tgtEl>
+                                      </p:cBhvr>
+                                      <p:to x="100000" y="60000"/>
+                                    </p:animScale>
+                                    <p:animScale>
+                                      <p:cBhvr>
+                                        <p:cTn id="29" dur="166" decel="50000">
+                                          <p:stCondLst>
+                                            <p:cond delay="676"/>
+                                          </p:stCondLst>
+                                        </p:cTn>
+                                        <p:tgtEl>
+                                          <p:spTgt spid="3">
+                                            <p:txEl>
+                                              <p:pRg st="1" end="1"/>
+                                            </p:txEl>
+                                          </p:spTgt>
+                                        </p:tgtEl>
+                                      </p:cBhvr>
+                                      <p:to x="100000" y="100000"/>
+                                    </p:animScale>
+                                    <p:animScale>
+                                      <p:cBhvr>
+                                        <p:cTn id="30" dur="26">
+                                          <p:stCondLst>
+                                            <p:cond delay="1312"/>
+                                          </p:stCondLst>
+                                        </p:cTn>
+                                        <p:tgtEl>
+                                          <p:spTgt spid="3">
+                                            <p:txEl>
+                                              <p:pRg st="1" end="1"/>
+                                            </p:txEl>
+                                          </p:spTgt>
+                                        </p:tgtEl>
+                                      </p:cBhvr>
+                                      <p:to x="100000" y="80000"/>
+                                    </p:animScale>
+                                    <p:animScale>
+                                      <p:cBhvr>
+                                        <p:cTn id="31" dur="166" decel="50000">
+                                          <p:stCondLst>
+                                            <p:cond delay="1338"/>
+                                          </p:stCondLst>
+                                        </p:cTn>
+                                        <p:tgtEl>
+                                          <p:spTgt spid="3">
+                                            <p:txEl>
+                                              <p:pRg st="1" end="1"/>
+                                            </p:txEl>
+                                          </p:spTgt>
+                                        </p:tgtEl>
+                                      </p:cBhvr>
+                                      <p:to x="100000" y="100000"/>
+                                    </p:animScale>
+                                    <p:animScale>
+                                      <p:cBhvr>
+                                        <p:cTn id="32" dur="26">
+                                          <p:stCondLst>
+                                            <p:cond delay="1642"/>
+                                          </p:stCondLst>
+                                        </p:cTn>
+                                        <p:tgtEl>
+                                          <p:spTgt spid="3">
+                                            <p:txEl>
+                                              <p:pRg st="1" end="1"/>
+                                            </p:txEl>
+                                          </p:spTgt>
+                                        </p:tgtEl>
+                                      </p:cBhvr>
+                                      <p:to x="100000" y="90000"/>
+                                    </p:animScale>
+                                    <p:animScale>
+                                      <p:cBhvr>
+                                        <p:cTn id="33" dur="166" decel="50000">
+                                          <p:stCondLst>
+                                            <p:cond delay="1668"/>
+                                          </p:stCondLst>
+                                        </p:cTn>
+                                        <p:tgtEl>
+                                          <p:spTgt spid="3">
+                                            <p:txEl>
+                                              <p:pRg st="1" end="1"/>
+                                            </p:txEl>
+                                          </p:spTgt>
+                                        </p:tgtEl>
+                                      </p:cBhvr>
+                                      <p:to x="100000" y="100000"/>
+                                    </p:animScale>
+                                    <p:animScale>
+                                      <p:cBhvr>
+                                        <p:cTn id="34" dur="26">
+                                          <p:stCondLst>
+                                            <p:cond delay="1808"/>
+                                          </p:stCondLst>
+                                        </p:cTn>
+                                        <p:tgtEl>
+                                          <p:spTgt spid="3">
+                                            <p:txEl>
+                                              <p:pRg st="1" end="1"/>
+                                            </p:txEl>
+                                          </p:spTgt>
+                                        </p:tgtEl>
+                                      </p:cBhvr>
+                                      <p:to x="100000" y="95000"/>
+                                    </p:animScale>
+                                    <p:animScale>
+                                      <p:cBhvr>
+                                        <p:cTn id="35" dur="166" decel="50000">
+                                          <p:stCondLst>
+                                            <p:cond delay="1834"/>
+                                          </p:stCondLst>
+                                        </p:cTn>
+                                        <p:tgtEl>
+                                          <p:spTgt spid="3">
+                                            <p:txEl>
+                                              <p:pRg st="1" end="1"/>
+                                            </p:txEl>
+                                          </p:spTgt>
+                                        </p:tgtEl>
+                                      </p:cBhvr>
+                                      <p:to x="100000" y="100000"/>
+                                    </p:animScale>
+                                  </p:childTnLst>
+                                </p:cTn>
+                              </p:par>
+                            </p:childTnLst>
+                          </p:cTn>
+                        </p:par>
+                      </p:childTnLst>
+                    </p:cTn>
+                  </p:par>
+                </p:childTnLst>
+              </p:cTn>
+              <p:prevCondLst>
+                <p:cond evt="onPrev" delay="0">
+                  <p:tgtEl>
+                    <p:sldTgt/>
+                  </p:tgtEl>
+                </p:cond>
+              </p:prevCondLst>
+              <p:nextCondLst>
+                <p:cond evt="onNext" delay="0">
+                  <p:tgtEl>
+                    <p:sldTgt/>
+                  </p:tgtEl>
+                </p:cond>
+              </p:nextCondLst>
+            </p:seq>
+          </p:childTnLst>
+        </p:cTn>
+      </p:par>
+    </p:tnLst>
+    <p:bldLst>
+      <p:bldP spid="2" grpId="0"/>
+    </p:bldLst>
+  </p:timing>
 </p:sld>
 </file>
 
@@ -6492,6 +7894,104 @@
   <p:clrMapOvr>
     <a:masterClrMapping/>
   </p:clrMapOvr>
+  <mc:AlternateContent xmlns:mc="http://schemas.openxmlformats.org/markup-compatibility/2006">
+    <mc:Choice xmlns:p15="http://schemas.microsoft.com/office/powerpoint/2012/main" Requires="p15">
+      <p:transition xmlns:p14="http://schemas.microsoft.com/office/powerpoint/2010/main" spd="slow" p14:dur="3250">
+        <p15:prstTrans prst="origami"/>
+      </p:transition>
+    </mc:Choice>
+    <mc:Fallback>
+      <p:transition spd="slow">
+        <p:fade/>
+      </p:transition>
+    </mc:Fallback>
+  </mc:AlternateContent>
+  <p:timing>
+    <p:tnLst>
+      <p:par>
+        <p:cTn id="1" dur="indefinite" restart="never" nodeType="tmRoot">
+          <p:childTnLst>
+            <p:seq concurrent="1" nextAc="seek">
+              <p:cTn id="2" dur="indefinite" nodeType="mainSeq">
+                <p:childTnLst>
+                  <p:par>
+                    <p:cTn id="3" fill="hold">
+                      <p:stCondLst>
+                        <p:cond delay="indefinite"/>
+                      </p:stCondLst>
+                      <p:childTnLst>
+                        <p:par>
+                          <p:cTn id="4" fill="hold">
+                            <p:stCondLst>
+                              <p:cond delay="0"/>
+                            </p:stCondLst>
+                            <p:childTnLst>
+                              <p:par>
+                                <p:cTn id="5" presetID="21" presetClass="entr" presetSubtype="1" fill="hold" grpId="0" nodeType="clickEffect">
+                                  <p:stCondLst>
+                                    <p:cond delay="0"/>
+                                  </p:stCondLst>
+                                  <p:childTnLst>
+                                    <p:set>
+                                      <p:cBhvr>
+                                        <p:cTn id="6" dur="1" fill="hold">
+                                          <p:stCondLst>
+                                            <p:cond delay="0"/>
+                                          </p:stCondLst>
+                                        </p:cTn>
+                                        <p:tgtEl>
+                                          <p:spTgt spid="2"/>
+                                        </p:tgtEl>
+                                        <p:attrNameLst>
+                                          <p:attrName>style.visibility</p:attrName>
+                                        </p:attrNameLst>
+                                      </p:cBhvr>
+                                      <p:to>
+                                        <p:strVal val="visible"/>
+                                      </p:to>
+                                    </p:set>
+                                    <p:animEffect transition="in" filter="wheel(1)">
+                                      <p:cBhvr>
+                                        <p:cTn id="7" dur="2000"/>
+                                        <p:tgtEl>
+                                          <p:spTgt spid="2"/>
+                                        </p:tgtEl>
+                                      </p:cBhvr>
+                                    </p:animEffect>
+                                  </p:childTnLst>
+                                </p:cTn>
+                              </p:par>
+                            </p:childTnLst>
+                          </p:cTn>
+                        </p:par>
+                      </p:childTnLst>
+                    </p:cTn>
+                  </p:par>
+                </p:childTnLst>
+              </p:cTn>
+              <p:prevCondLst>
+                <p:cond evt="onPrev" delay="0">
+                  <p:tgtEl>
+                    <p:sldTgt/>
+                  </p:tgtEl>
+                </p:cond>
+              </p:prevCondLst>
+              <p:nextCondLst>
+                <p:cond evt="onNext" delay="0">
+                  <p:tgtEl>
+                    <p:sldTgt/>
+                  </p:tgtEl>
+                </p:cond>
+              </p:nextCondLst>
+            </p:seq>
+          </p:childTnLst>
+        </p:cTn>
+      </p:par>
+    </p:tnLst>
+    <p:bldLst>
+      <p:bldP spid="2" grpId="0"/>
+    </p:bldLst>
+  </p:timing>
 </p:sld>
 </file>
 
@@ -6577,6 +8077,150 @@
   <p:clrMapOvr>
     <a:masterClrMapping/>
   </p:clrMapOvr>
+  <mc:AlternateContent xmlns:mc="http://schemas.openxmlformats.org/markup-compatibility/2006">
+    <mc:Choice xmlns:p15="http://schemas.microsoft.com/office/powerpoint/2012/main" Requires="p15">
+      <p:transition xmlns:p14="http://schemas.microsoft.com/office/powerpoint/2010/main" spd="slow" p14:dur="3250">
+        <p15:prstTrans prst="origami"/>
+      </p:transition>
+    </mc:Choice>
+    <mc:Fallback>
+      <p:transition spd="slow">
+        <p:fade/>
+      </p:transition>
+    </mc:Fallback>
+  </mc:AlternateContent>
+  <p:timing>
+    <p:tnLst>
+      <p:par>
+        <p:cTn id="1" dur="indefinite" restart="never" nodeType="tmRoot">
+          <p:childTnLst>
+            <p:seq concurrent="1" nextAc="seek">
+              <p:cTn id="2" dur="indefinite" nodeType="mainSeq">
+                <p:childTnLst>
+                  <p:par>
+                    <p:cTn id="3" fill="hold">
+                      <p:stCondLst>
+                        <p:cond delay="indefinite"/>
+                      </p:stCondLst>
+                      <p:childTnLst>
+                        <p:par>
+                          <p:cTn id="4" fill="hold">
+                            <p:stCondLst>
+                              <p:cond delay="0"/>
+                            </p:stCondLst>
+                            <p:childTnLst>
+                              <p:par>
+                                <p:cTn id="5" presetID="45" presetClass="entr" presetSubtype="0" fill="hold" grpId="0" nodeType="clickEffect">
+                                  <p:stCondLst>
+                                    <p:cond delay="0"/>
+                                  </p:stCondLst>
+                                  <p:childTnLst>
+                                    <p:set>
+                                      <p:cBhvr>
+                                        <p:cTn id="6" dur="1" fill="hold">
+                                          <p:stCondLst>
+                                            <p:cond delay="0"/>
+                                          </p:stCondLst>
+                                        </p:cTn>
+                                        <p:tgtEl>
+                                          <p:spTgt spid="2"/>
+                                        </p:tgtEl>
+                                        <p:attrNameLst>
+                                          <p:attrName>style.visibility</p:attrName>
+                                        </p:attrNameLst>
+                                      </p:cBhvr>
+                                      <p:to>
+                                        <p:strVal val="visible"/>
+                                      </p:to>
+                                    </p:set>
+                                    <p:animEffect transition="in" filter="fade">
+                                      <p:cBhvr>
+                                        <p:cTn id="7" dur="2000"/>
+                                        <p:tgtEl>
+                                          <p:spTgt spid="2"/>
+                                        </p:tgtEl>
+                                      </p:cBhvr>
+                                    </p:animEffect>
+                                    <p:anim calcmode="lin" valueType="num">
+                                      <p:cBhvr>
+                                        <p:cTn id="8" dur="2000" fill="hold"/>
+                                        <p:tgtEl>
+                                          <p:spTgt spid="2"/>
+                                        </p:tgtEl>
+                                        <p:attrNameLst>
+                                          <p:attrName>ppt_w</p:attrName>
+                                        </p:attrNameLst>
+                                      </p:cBhvr>
+                                      <p:tavLst>
+                                        <p:tav tm="0" fmla="#ppt_w*sin(2.5*pi*$)">
+                                          <p:val>
+                                            <p:fltVal val="0"/>
+                                          </p:val>
+                                        </p:tav>
+                                        <p:tav tm="100000">
+                                          <p:val>
+                                            <p:fltVal val="1"/>
+                                          </p:val>
+                                        </p:tav>
+                                      </p:tavLst>
+                                    </p:anim>
+                                    <p:anim calcmode="lin" valueType="num">
+                                      <p:cBhvr>
+                                        <p:cTn id="9" dur="2000" fill="hold"/>
+                                        <p:tgtEl>
+                                          <p:spTgt spid="2"/>
+                                        </p:tgtEl>
+                                        <p:attrNameLst>
+                                          <p:attrName>ppt_h</p:attrName>
+                                        </p:attrNameLst>
+                                      </p:cBhvr>
+                                      <p:tavLst>
+                                        <p:tav tm="0">
+                                          <p:val>
+                                            <p:strVal val="#ppt_h"/>
+                                          </p:val>
+                                        </p:tav>
+                                        <p:tav tm="100000">
+                                          <p:val>
+                                            <p:strVal val="#ppt_h"/>
+                                          </p:val>
+                                        </p:tav>
+                                      </p:tavLst>
+                                    </p:anim>
+                                  </p:childTnLst>
+                                </p:cTn>
+                              </p:par>
+                            </p:childTnLst>
+                          </p:cTn>
+                        </p:par>
+                      </p:childTnLst>
+                    </p:cTn>
+                  </p:par>
+                </p:childTnLst>
+              </p:cTn>
+              <p:prevCondLst>
+                <p:cond evt="onPrev" delay="0">
+                  <p:tgtEl>
+                    <p:sldTgt/>
+                  </p:tgtEl>
+                </p:cond>
+              </p:prevCondLst>
+              <p:nextCondLst>
+                <p:cond evt="onNext" delay="0">
+                  <p:tgtEl>
+                    <p:sldTgt/>
+                  </p:tgtEl>
+                </p:cond>
+              </p:nextCondLst>
+            </p:seq>
+          </p:childTnLst>
+        </p:cTn>
+      </p:par>
+    </p:tnLst>
+    <p:bldLst>
+      <p:bldP spid="2" grpId="0"/>
+    </p:bldLst>
+  </p:timing>
 </p:sld>
 </file>
 

--- a/RRB_Trump_Epstein_playground_Nagyteteny_ppt2 (1).pptx
+++ b/RRB_Trump_Epstein_playground_Nagyteteny_ppt2 (1).pptx
@@ -10,7 +10,6 @@
     <p:sldId id="258" r:id="rId4"/>
     <p:sldId id="259" r:id="rId5"/>
     <p:sldId id="260" r:id="rId6"/>
-    <p:sldId id="261" r:id="rId7"/>
   </p:sldIdLst>
   <p:sldSz cx="12192000" cy="6858000"/>
   <p:notesSz cx="6858000" cy="9144000"/>
@@ -448,7 +447,7 @@
           <a:p>
             <a:fld id="{A872EF4C-FF12-49F2-ACE0-A2648E0A2B99}" type="datetimeFigureOut">
               <a:rPr lang="hu-HU" smtClean="0"/>
-              <a:t>2026.10.08.</a:t>
+              <a:t>2026.10.12.</a:t>
             </a:fld>
             <a:endParaRPr lang="hu-HU"/>
           </a:p>
@@ -772,7 +771,7 @@
           <a:p>
             <a:fld id="{A872EF4C-FF12-49F2-ACE0-A2648E0A2B99}" type="datetimeFigureOut">
               <a:rPr lang="hu-HU" smtClean="0"/>
-              <a:t>2026.10.08.</a:t>
+              <a:t>2026.10.12.</a:t>
             </a:fld>
             <a:endParaRPr lang="hu-HU"/>
           </a:p>
@@ -1020,7 +1019,7 @@
           <a:p>
             <a:fld id="{A872EF4C-FF12-49F2-ACE0-A2648E0A2B99}" type="datetimeFigureOut">
               <a:rPr lang="hu-HU" smtClean="0"/>
-              <a:t>2026.10.08.</a:t>
+              <a:t>2026.10.12.</a:t>
             </a:fld>
             <a:endParaRPr lang="hu-HU"/>
           </a:p>
@@ -1359,7 +1358,7 @@
           <a:p>
             <a:fld id="{A872EF4C-FF12-49F2-ACE0-A2648E0A2B99}" type="datetimeFigureOut">
               <a:rPr lang="hu-HU" smtClean="0"/>
-              <a:t>2026.10.08.</a:t>
+              <a:t>2026.10.12.</a:t>
             </a:fld>
             <a:endParaRPr lang="hu-HU"/>
           </a:p>
@@ -1706,7 +1705,7 @@
           <a:p>
             <a:fld id="{A872EF4C-FF12-49F2-ACE0-A2648E0A2B99}" type="datetimeFigureOut">
               <a:rPr lang="hu-HU" smtClean="0"/>
-              <a:t>2026.10.08.</a:t>
+              <a:t>2026.10.12.</a:t>
             </a:fld>
             <a:endParaRPr lang="hu-HU"/>
           </a:p>
@@ -2080,7 +2079,7 @@
           <a:p>
             <a:fld id="{A872EF4C-FF12-49F2-ACE0-A2648E0A2B99}" type="datetimeFigureOut">
               <a:rPr lang="hu-HU" smtClean="0"/>
-              <a:t>2026.10.08.</a:t>
+              <a:t>2026.10.12.</a:t>
             </a:fld>
             <a:endParaRPr lang="hu-HU"/>
           </a:p>
@@ -2550,7 +2549,7 @@
           <a:p>
             <a:fld id="{A872EF4C-FF12-49F2-ACE0-A2648E0A2B99}" type="datetimeFigureOut">
               <a:rPr lang="hu-HU" smtClean="0"/>
-              <a:t>2026.10.08.</a:t>
+              <a:t>2026.10.12.</a:t>
             </a:fld>
             <a:endParaRPr lang="hu-HU"/>
           </a:p>
@@ -2755,7 +2754,7 @@
           <a:p>
             <a:fld id="{A872EF4C-FF12-49F2-ACE0-A2648E0A2B99}" type="datetimeFigureOut">
               <a:rPr lang="hu-HU" smtClean="0"/>
-              <a:t>2026.10.08.</a:t>
+              <a:t>2026.10.12.</a:t>
             </a:fld>
             <a:endParaRPr lang="hu-HU"/>
           </a:p>
@@ -2966,7 +2965,7 @@
           <a:p>
             <a:fld id="{A872EF4C-FF12-49F2-ACE0-A2648E0A2B99}" type="datetimeFigureOut">
               <a:rPr lang="hu-HU" smtClean="0"/>
-              <a:t>2026.10.08.</a:t>
+              <a:t>2026.10.12.</a:t>
             </a:fld>
             <a:endParaRPr lang="hu-HU"/>
           </a:p>
@@ -3198,7 +3197,7 @@
           <a:p>
             <a:fld id="{A872EF4C-FF12-49F2-ACE0-A2648E0A2B99}" type="datetimeFigureOut">
               <a:rPr lang="hu-HU" smtClean="0"/>
-              <a:t>2026.10.08.</a:t>
+              <a:t>2026.10.12.</a:t>
             </a:fld>
             <a:endParaRPr lang="hu-HU"/>
           </a:p>
@@ -3446,7 +3445,7 @@
           <a:p>
             <a:fld id="{A872EF4C-FF12-49F2-ACE0-A2648E0A2B99}" type="datetimeFigureOut">
               <a:rPr lang="hu-HU" smtClean="0"/>
-              <a:t>2026.10.08.</a:t>
+              <a:t>2026.10.12.</a:t>
             </a:fld>
             <a:endParaRPr lang="hu-HU"/>
           </a:p>
@@ -3744,7 +3743,7 @@
           <a:p>
             <a:fld id="{A872EF4C-FF12-49F2-ACE0-A2648E0A2B99}" type="datetimeFigureOut">
               <a:rPr lang="hu-HU" smtClean="0"/>
-              <a:t>2026.10.08.</a:t>
+              <a:t>2026.10.12.</a:t>
             </a:fld>
             <a:endParaRPr lang="hu-HU"/>
           </a:p>
@@ -4138,7 +4137,7 @@
           <a:p>
             <a:fld id="{A872EF4C-FF12-49F2-ACE0-A2648E0A2B99}" type="datetimeFigureOut">
               <a:rPr lang="hu-HU" smtClean="0"/>
-              <a:t>2026.10.08.</a:t>
+              <a:t>2026.10.12.</a:t>
             </a:fld>
             <a:endParaRPr lang="hu-HU"/>
           </a:p>
@@ -4287,7 +4286,7 @@
           <a:p>
             <a:fld id="{A872EF4C-FF12-49F2-ACE0-A2648E0A2B99}" type="datetimeFigureOut">
               <a:rPr lang="hu-HU" smtClean="0"/>
-              <a:t>2026.10.08.</a:t>
+              <a:t>2026.10.12.</a:t>
             </a:fld>
             <a:endParaRPr lang="hu-HU"/>
           </a:p>
@@ -4413,7 +4412,7 @@
           <a:p>
             <a:fld id="{A872EF4C-FF12-49F2-ACE0-A2648E0A2B99}" type="datetimeFigureOut">
               <a:rPr lang="hu-HU" smtClean="0"/>
-              <a:t>2026.10.08.</a:t>
+              <a:t>2026.10.12.</a:t>
             </a:fld>
             <a:endParaRPr lang="hu-HU"/>
           </a:p>
@@ -4668,7 +4667,7 @@
           <a:p>
             <a:fld id="{A872EF4C-FF12-49F2-ACE0-A2648E0A2B99}" type="datetimeFigureOut">
               <a:rPr lang="hu-HU" smtClean="0"/>
-              <a:t>2026.10.08.</a:t>
+              <a:t>2026.10.12.</a:t>
             </a:fld>
             <a:endParaRPr lang="hu-HU"/>
           </a:p>
@@ -4983,7 +4982,7 @@
           <a:p>
             <a:fld id="{A872EF4C-FF12-49F2-ACE0-A2648E0A2B99}" type="datetimeFigureOut">
               <a:rPr lang="hu-HU" smtClean="0"/>
-              <a:t>2026.10.08.</a:t>
+              <a:t>2026.10.12.</a:t>
             </a:fld>
             <a:endParaRPr lang="hu-HU"/>
           </a:p>
@@ -5334,7 +5333,7 @@
           <a:p>
             <a:fld id="{A872EF4C-FF12-49F2-ACE0-A2648E0A2B99}" type="datetimeFigureOut">
               <a:rPr lang="hu-HU" smtClean="0"/>
-              <a:t>2026.10.08.</a:t>
+              <a:t>2026.10.12.</a:t>
             </a:fld>
             <a:endParaRPr lang="hu-HU"/>
           </a:p>
@@ -6040,13 +6039,13 @@
   <p:clrMapOvr>
     <a:masterClrMapping/>
   </p:clrMapOvr>
-  <mc:AlternateContent xmlns:mc="http://schemas.openxmlformats.org/markup-compatibility/2006">
-    <mc:Choice xmlns:p15="http://schemas.microsoft.com/office/powerpoint/2012/main" Requires="p15">
+  <mc:AlternateContent xmlns:mc="http://schemas.openxmlformats.org/markup-compatibility/2006" xmlns:p15="http://schemas.microsoft.com/office/powerpoint/2012/main">
+    <mc:Choice Requires="p15">
       <p:transition xmlns:p14="http://schemas.microsoft.com/office/powerpoint/2010/main" spd="slow" p14:dur="3250">
         <p15:prstTrans prst="origami"/>
       </p:transition>
     </mc:Choice>
-    <mc:Fallback>
+    <mc:Fallback xmlns="">
       <p:transition spd="slow">
         <p:fade/>
       </p:transition>
@@ -6417,13 +6416,13 @@
   <p:clrMapOvr>
     <a:masterClrMapping/>
   </p:clrMapOvr>
-  <mc:AlternateContent xmlns:mc="http://schemas.openxmlformats.org/markup-compatibility/2006">
-    <mc:Choice xmlns:p15="http://schemas.microsoft.com/office/powerpoint/2012/main" Requires="p15">
+  <mc:AlternateContent xmlns:mc="http://schemas.openxmlformats.org/markup-compatibility/2006" xmlns:p15="http://schemas.microsoft.com/office/powerpoint/2012/main">
+    <mc:Choice Requires="p15">
       <p:transition xmlns:p14="http://schemas.microsoft.com/office/powerpoint/2010/main" spd="slow" p14:dur="3250">
         <p15:prstTrans prst="origami"/>
       </p:transition>
     </mc:Choice>
-    <mc:Fallback>
+    <mc:Fallback xmlns="">
       <p:transition spd="slow">
         <p:fade/>
       </p:transition>
@@ -6889,6 +6888,56 @@
           </a:p>
         </p:txBody>
       </p:sp>
+      <p:pic>
+        <p:nvPicPr>
+          <p:cNvPr id="4" name="Kép 3">
+            <a:extLst>
+              <a:ext uri="{FF2B5EF4-FFF2-40B4-BE49-F238E27FC236}">
+                <a16:creationId xmlns:a16="http://schemas.microsoft.com/office/drawing/2014/main" id="{E62D054A-0E4F-4F5D-B900-C52C996A00A1}"/>
+              </a:ext>
+            </a:extLst>
+          </p:cNvPr>
+          <p:cNvPicPr>
+            <a:picLocks noChangeAspect="1"/>
+          </p:cNvPicPr>
+          <p:nvPr/>
+        </p:nvPicPr>
+        <p:blipFill>
+          <a:blip r:embed="rId2">
+            <a:extLst>
+              <a:ext uri="{28A0092B-C50C-407E-A947-70E740481C1C}">
+                <a14:useLocalDpi xmlns:a14="http://schemas.microsoft.com/office/drawing/2010/main" val="0"/>
+              </a:ext>
+            </a:extLst>
+          </a:blip>
+          <a:stretch>
+            <a:fillRect/>
+          </a:stretch>
+        </p:blipFill>
+        <p:spPr>
+          <a:xfrm>
+            <a:off x="4396138" y="205062"/>
+            <a:ext cx="3399723" cy="1913027"/>
+          </a:xfrm>
+          <a:prstGeom prst="rect">
+            <a:avLst/>
+          </a:prstGeom>
+          <a:ln w="38100" cap="sq">
+            <a:solidFill>
+              <a:srgbClr val="000000"/>
+            </a:solidFill>
+            <a:prstDash val="solid"/>
+            <a:miter lim="800000"/>
+          </a:ln>
+          <a:effectLst>
+            <a:outerShdw blurRad="50800" dist="38100" dir="2700000" algn="tl" rotWithShape="0">
+              <a:srgbClr val="000000">
+                <a:alpha val="43000"/>
+              </a:srgbClr>
+            </a:outerShdw>
+          </a:effectLst>
+        </p:spPr>
+      </p:pic>
     </p:spTree>
     <p:extLst>
       <p:ext uri="{BB962C8B-B14F-4D97-AF65-F5344CB8AC3E}">
@@ -6899,13 +6948,13 @@
   <p:clrMapOvr>
     <a:masterClrMapping/>
   </p:clrMapOvr>
-  <mc:AlternateContent xmlns:mc="http://schemas.openxmlformats.org/markup-compatibility/2006">
-    <mc:Choice xmlns:p15="http://schemas.microsoft.com/office/powerpoint/2012/main" Requires="p15">
+  <mc:AlternateContent xmlns:mc="http://schemas.openxmlformats.org/markup-compatibility/2006" xmlns:p15="http://schemas.microsoft.com/office/powerpoint/2012/main">
+    <mc:Choice Requires="p15">
       <p:transition xmlns:p14="http://schemas.microsoft.com/office/powerpoint/2010/main" spd="slow" p14:dur="3250">
         <p15:prstTrans prst="origami"/>
       </p:transition>
     </mc:Choice>
-    <mc:Fallback>
+    <mc:Fallback xmlns="">
       <p:transition spd="slow">
         <p:fade/>
       </p:transition>
@@ -7009,6 +7058,302 @@
                                         </p:tav>
                                       </p:tavLst>
                                     </p:anim>
+                                  </p:childTnLst>
+                                </p:cTn>
+                              </p:par>
+                            </p:childTnLst>
+                          </p:cTn>
+                        </p:par>
+                      </p:childTnLst>
+                    </p:cTn>
+                  </p:par>
+                  <p:par>
+                    <p:cTn id="10" fill="hold">
+                      <p:stCondLst>
+                        <p:cond delay="indefinite"/>
+                      </p:stCondLst>
+                      <p:childTnLst>
+                        <p:par>
+                          <p:cTn id="11" fill="hold">
+                            <p:stCondLst>
+                              <p:cond delay="0"/>
+                            </p:stCondLst>
+                            <p:childTnLst>
+                              <p:par>
+                                <p:cTn id="12" presetID="26" presetClass="entr" presetSubtype="0" fill="hold" nodeType="clickEffect">
+                                  <p:stCondLst>
+                                    <p:cond delay="0"/>
+                                  </p:stCondLst>
+                                  <p:childTnLst>
+                                    <p:set>
+                                      <p:cBhvr>
+                                        <p:cTn id="13" dur="1" fill="hold">
+                                          <p:stCondLst>
+                                            <p:cond delay="0"/>
+                                          </p:stCondLst>
+                                        </p:cTn>
+                                        <p:tgtEl>
+                                          <p:spTgt spid="4"/>
+                                        </p:tgtEl>
+                                        <p:attrNameLst>
+                                          <p:attrName>style.visibility</p:attrName>
+                                        </p:attrNameLst>
+                                      </p:cBhvr>
+                                      <p:to>
+                                        <p:strVal val="visible"/>
+                                      </p:to>
+                                    </p:set>
+                                    <p:animEffect transition="in" filter="wipe(down)">
+                                      <p:cBhvr>
+                                        <p:cTn id="14" dur="580">
+                                          <p:stCondLst>
+                                            <p:cond delay="0"/>
+                                          </p:stCondLst>
+                                        </p:cTn>
+                                        <p:tgtEl>
+                                          <p:spTgt spid="4"/>
+                                        </p:tgtEl>
+                                      </p:cBhvr>
+                                    </p:animEffect>
+                                    <p:anim calcmode="lin" valueType="num">
+                                      <p:cBhvr>
+                                        <p:cTn id="15" dur="1822" tmFilter="0,0; 0.14,0.36; 0.43,0.73; 0.71,0.91; 1.0,1.0">
+                                          <p:stCondLst>
+                                            <p:cond delay="0"/>
+                                          </p:stCondLst>
+                                        </p:cTn>
+                                        <p:tgtEl>
+                                          <p:spTgt spid="4"/>
+                                        </p:tgtEl>
+                                        <p:attrNameLst>
+                                          <p:attrName>ppt_x</p:attrName>
+                                        </p:attrNameLst>
+                                      </p:cBhvr>
+                                      <p:tavLst>
+                                        <p:tav tm="0">
+                                          <p:val>
+                                            <p:strVal val="#ppt_x-0.25"/>
+                                          </p:val>
+                                        </p:tav>
+                                        <p:tav tm="100000">
+                                          <p:val>
+                                            <p:strVal val="#ppt_x"/>
+                                          </p:val>
+                                        </p:tav>
+                                      </p:tavLst>
+                                    </p:anim>
+                                    <p:anim calcmode="lin" valueType="num">
+                                      <p:cBhvr>
+                                        <p:cTn id="16" dur="664" tmFilter="0.0,0.0; 0.25,0.07; 0.50,0.2; 0.75,0.467; 1.0,1.0">
+                                          <p:stCondLst>
+                                            <p:cond delay="0"/>
+                                          </p:stCondLst>
+                                        </p:cTn>
+                                        <p:tgtEl>
+                                          <p:spTgt spid="4"/>
+                                        </p:tgtEl>
+                                        <p:attrNameLst>
+                                          <p:attrName>ppt_y</p:attrName>
+                                        </p:attrNameLst>
+                                      </p:cBhvr>
+                                      <p:tavLst>
+                                        <p:tav tm="0" fmla="#ppt_y-sin(pi*$)/3">
+                                          <p:val>
+                                            <p:fltVal val="0.5"/>
+                                          </p:val>
+                                        </p:tav>
+                                        <p:tav tm="100000">
+                                          <p:val>
+                                            <p:fltVal val="1"/>
+                                          </p:val>
+                                        </p:tav>
+                                      </p:tavLst>
+                                    </p:anim>
+                                    <p:anim calcmode="lin" valueType="num">
+                                      <p:cBhvr>
+                                        <p:cTn id="17" dur="664" tmFilter="0, 0; 0.125,0.2665; 0.25,0.4; 0.375,0.465; 0.5,0.5;  0.625,0.535; 0.75,0.6; 0.875,0.7335; 1,1">
+                                          <p:stCondLst>
+                                            <p:cond delay="664"/>
+                                          </p:stCondLst>
+                                        </p:cTn>
+                                        <p:tgtEl>
+                                          <p:spTgt spid="4"/>
+                                        </p:tgtEl>
+                                        <p:attrNameLst>
+                                          <p:attrName>ppt_y</p:attrName>
+                                        </p:attrNameLst>
+                                      </p:cBhvr>
+                                      <p:tavLst>
+                                        <p:tav tm="0" fmla="#ppt_y-sin(pi*$)/9">
+                                          <p:val>
+                                            <p:fltVal val="0"/>
+                                          </p:val>
+                                        </p:tav>
+                                        <p:tav tm="100000">
+                                          <p:val>
+                                            <p:fltVal val="1"/>
+                                          </p:val>
+                                        </p:tav>
+                                      </p:tavLst>
+                                    </p:anim>
+                                    <p:anim calcmode="lin" valueType="num">
+                                      <p:cBhvr>
+                                        <p:cTn id="18" dur="332" tmFilter="0, 0; 0.125,0.2665; 0.25,0.4; 0.375,0.465; 0.5,0.5;  0.625,0.535; 0.75,0.6; 0.875,0.7335; 1,1">
+                                          <p:stCondLst>
+                                            <p:cond delay="1324"/>
+                                          </p:stCondLst>
+                                        </p:cTn>
+                                        <p:tgtEl>
+                                          <p:spTgt spid="4"/>
+                                        </p:tgtEl>
+                                        <p:attrNameLst>
+                                          <p:attrName>ppt_y</p:attrName>
+                                        </p:attrNameLst>
+                                      </p:cBhvr>
+                                      <p:tavLst>
+                                        <p:tav tm="0" fmla="#ppt_y-sin(pi*$)/27">
+                                          <p:val>
+                                            <p:fltVal val="0"/>
+                                          </p:val>
+                                        </p:tav>
+                                        <p:tav tm="100000">
+                                          <p:val>
+                                            <p:fltVal val="1"/>
+                                          </p:val>
+                                        </p:tav>
+                                      </p:tavLst>
+                                    </p:anim>
+                                    <p:anim calcmode="lin" valueType="num">
+                                      <p:cBhvr>
+                                        <p:cTn id="19" dur="164" tmFilter="0, 0; 0.125,0.2665; 0.25,0.4; 0.375,0.465; 0.5,0.5;  0.625,0.535; 0.75,0.6; 0.875,0.7335; 1,1">
+                                          <p:stCondLst>
+                                            <p:cond delay="1656"/>
+                                          </p:stCondLst>
+                                        </p:cTn>
+                                        <p:tgtEl>
+                                          <p:spTgt spid="4"/>
+                                        </p:tgtEl>
+                                        <p:attrNameLst>
+                                          <p:attrName>ppt_y</p:attrName>
+                                        </p:attrNameLst>
+                                      </p:cBhvr>
+                                      <p:tavLst>
+                                        <p:tav tm="0" fmla="#ppt_y-sin(pi*$)/81">
+                                          <p:val>
+                                            <p:fltVal val="0"/>
+                                          </p:val>
+                                        </p:tav>
+                                        <p:tav tm="100000">
+                                          <p:val>
+                                            <p:fltVal val="1"/>
+                                          </p:val>
+                                        </p:tav>
+                                      </p:tavLst>
+                                    </p:anim>
+                                    <p:animScale>
+                                      <p:cBhvr>
+                                        <p:cTn id="20" dur="26">
+                                          <p:stCondLst>
+                                            <p:cond delay="650"/>
+                                          </p:stCondLst>
+                                        </p:cTn>
+                                        <p:tgtEl>
+                                          <p:spTgt spid="4"/>
+                                        </p:tgtEl>
+                                      </p:cBhvr>
+                                      <p:to x="100000" y="60000"/>
+                                    </p:animScale>
+                                    <p:animScale>
+                                      <p:cBhvr>
+                                        <p:cTn id="21" dur="166" decel="50000">
+                                          <p:stCondLst>
+                                            <p:cond delay="676"/>
+                                          </p:stCondLst>
+                                        </p:cTn>
+                                        <p:tgtEl>
+                                          <p:spTgt spid="4"/>
+                                        </p:tgtEl>
+                                      </p:cBhvr>
+                                      <p:to x="100000" y="100000"/>
+                                    </p:animScale>
+                                    <p:animScale>
+                                      <p:cBhvr>
+                                        <p:cTn id="22" dur="26">
+                                          <p:stCondLst>
+                                            <p:cond delay="1312"/>
+                                          </p:stCondLst>
+                                        </p:cTn>
+                                        <p:tgtEl>
+                                          <p:spTgt spid="4"/>
+                                        </p:tgtEl>
+                                      </p:cBhvr>
+                                      <p:to x="100000" y="80000"/>
+                                    </p:animScale>
+                                    <p:animScale>
+                                      <p:cBhvr>
+                                        <p:cTn id="23" dur="166" decel="50000">
+                                          <p:stCondLst>
+                                            <p:cond delay="1338"/>
+                                          </p:stCondLst>
+                                        </p:cTn>
+                                        <p:tgtEl>
+                                          <p:spTgt spid="4"/>
+                                        </p:tgtEl>
+                                      </p:cBhvr>
+                                      <p:to x="100000" y="100000"/>
+                                    </p:animScale>
+                                    <p:animScale>
+                                      <p:cBhvr>
+                                        <p:cTn id="24" dur="26">
+                                          <p:stCondLst>
+                                            <p:cond delay="1642"/>
+                                          </p:stCondLst>
+                                        </p:cTn>
+                                        <p:tgtEl>
+                                          <p:spTgt spid="4"/>
+                                        </p:tgtEl>
+                                      </p:cBhvr>
+                                      <p:to x="100000" y="90000"/>
+                                    </p:animScale>
+                                    <p:animScale>
+                                      <p:cBhvr>
+                                        <p:cTn id="25" dur="166" decel="50000">
+                                          <p:stCondLst>
+                                            <p:cond delay="1668"/>
+                                          </p:stCondLst>
+                                        </p:cTn>
+                                        <p:tgtEl>
+                                          <p:spTgt spid="4"/>
+                                        </p:tgtEl>
+                                      </p:cBhvr>
+                                      <p:to x="100000" y="100000"/>
+                                    </p:animScale>
+                                    <p:animScale>
+                                      <p:cBhvr>
+                                        <p:cTn id="26" dur="26">
+                                          <p:stCondLst>
+                                            <p:cond delay="1808"/>
+                                          </p:stCondLst>
+                                        </p:cTn>
+                                        <p:tgtEl>
+                                          <p:spTgt spid="4"/>
+                                        </p:tgtEl>
+                                      </p:cBhvr>
+                                      <p:to x="100000" y="95000"/>
+                                    </p:animScale>
+                                    <p:animScale>
+                                      <p:cBhvr>
+                                        <p:cTn id="27" dur="166" decel="50000">
+                                          <p:stCondLst>
+                                            <p:cond delay="1834"/>
+                                          </p:stCondLst>
+                                        </p:cTn>
+                                        <p:tgtEl>
+                                          <p:spTgt spid="4"/>
+                                        </p:tgtEl>
+                                      </p:cBhvr>
+                                      <p:to x="100000" y="100000"/>
+                                    </p:animScale>
                                   </p:childTnLst>
                                 </p:cTn>
                               </p:par>
@@ -7159,6 +7504,56 @@
           </a:p>
         </p:txBody>
       </p:sp>
+      <p:pic>
+        <p:nvPicPr>
+          <p:cNvPr id="5" name="Kép 4">
+            <a:extLst>
+              <a:ext uri="{FF2B5EF4-FFF2-40B4-BE49-F238E27FC236}">
+                <a16:creationId xmlns:a16="http://schemas.microsoft.com/office/drawing/2014/main" id="{6A022434-488E-4410-AD49-53F2A8A90C75}"/>
+              </a:ext>
+            </a:extLst>
+          </p:cNvPr>
+          <p:cNvPicPr>
+            <a:picLocks noChangeAspect="1"/>
+          </p:cNvPicPr>
+          <p:nvPr/>
+        </p:nvPicPr>
+        <p:blipFill>
+          <a:blip r:embed="rId2">
+            <a:extLst>
+              <a:ext uri="{28A0092B-C50C-407E-A947-70E740481C1C}">
+                <a14:useLocalDpi xmlns:a14="http://schemas.microsoft.com/office/drawing/2010/main" val="0"/>
+              </a:ext>
+            </a:extLst>
+          </a:blip>
+          <a:stretch>
+            <a:fillRect/>
+          </a:stretch>
+        </p:blipFill>
+        <p:spPr>
+          <a:xfrm>
+            <a:off x="4426106" y="4793841"/>
+            <a:ext cx="3339787" cy="1879601"/>
+          </a:xfrm>
+          <a:prstGeom prst="rect">
+            <a:avLst/>
+          </a:prstGeom>
+          <a:ln w="38100" cap="sq">
+            <a:solidFill>
+              <a:srgbClr val="000000"/>
+            </a:solidFill>
+            <a:prstDash val="solid"/>
+            <a:miter lim="800000"/>
+          </a:ln>
+          <a:effectLst>
+            <a:outerShdw blurRad="50800" dist="38100" dir="2700000" algn="tl" rotWithShape="0">
+              <a:srgbClr val="000000">
+                <a:alpha val="43000"/>
+              </a:srgbClr>
+            </a:outerShdw>
+          </a:effectLst>
+        </p:spPr>
+      </p:pic>
     </p:spTree>
     <p:extLst>
       <p:ext uri="{BB962C8B-B14F-4D97-AF65-F5344CB8AC3E}">
@@ -7169,13 +7564,13 @@
   <p:clrMapOvr>
     <a:masterClrMapping/>
   </p:clrMapOvr>
-  <mc:AlternateContent xmlns:mc="http://schemas.openxmlformats.org/markup-compatibility/2006">
-    <mc:Choice xmlns:p15="http://schemas.microsoft.com/office/powerpoint/2012/main" Requires="p15">
+  <mc:AlternateContent xmlns:mc="http://schemas.openxmlformats.org/markup-compatibility/2006" xmlns:p15="http://schemas.microsoft.com/office/powerpoint/2012/main">
+    <mc:Choice Requires="p15">
       <p:transition xmlns:p14="http://schemas.microsoft.com/office/powerpoint/2010/main" spd="slow" p14:dur="3250">
         <p15:prstTrans prst="origami"/>
       </p:transition>
     </mc:Choice>
-    <mc:Fallback>
+    <mc:Fallback xmlns="">
       <p:transition spd="slow">
         <p:fade/>
       </p:transition>
@@ -7777,6 +8172,105 @@
                                       </p:cBhvr>
                                       <p:to x="100000" y="100000"/>
                                     </p:animScale>
+                                  </p:childTnLst>
+                                </p:cTn>
+                              </p:par>
+                            </p:childTnLst>
+                          </p:cTn>
+                        </p:par>
+                      </p:childTnLst>
+                    </p:cTn>
+                  </p:par>
+                  <p:par>
+                    <p:cTn id="36" fill="hold">
+                      <p:stCondLst>
+                        <p:cond delay="indefinite"/>
+                      </p:stCondLst>
+                      <p:childTnLst>
+                        <p:par>
+                          <p:cTn id="37" fill="hold">
+                            <p:stCondLst>
+                              <p:cond delay="0"/>
+                            </p:stCondLst>
+                            <p:childTnLst>
+                              <p:par>
+                                <p:cTn id="38" presetID="45" presetClass="entr" presetSubtype="0" fill="hold" nodeType="clickEffect">
+                                  <p:stCondLst>
+                                    <p:cond delay="0"/>
+                                  </p:stCondLst>
+                                  <p:childTnLst>
+                                    <p:set>
+                                      <p:cBhvr>
+                                        <p:cTn id="39" dur="1" fill="hold">
+                                          <p:stCondLst>
+                                            <p:cond delay="0"/>
+                                          </p:stCondLst>
+                                        </p:cTn>
+                                        <p:tgtEl>
+                                          <p:spTgt spid="5"/>
+                                        </p:tgtEl>
+                                        <p:attrNameLst>
+                                          <p:attrName>style.visibility</p:attrName>
+                                        </p:attrNameLst>
+                                      </p:cBhvr>
+                                      <p:to>
+                                        <p:strVal val="visible"/>
+                                      </p:to>
+                                    </p:set>
+                                    <p:animEffect transition="in" filter="fade">
+                                      <p:cBhvr>
+                                        <p:cTn id="40" dur="2000"/>
+                                        <p:tgtEl>
+                                          <p:spTgt spid="5"/>
+                                        </p:tgtEl>
+                                      </p:cBhvr>
+                                    </p:animEffect>
+                                    <p:anim calcmode="lin" valueType="num">
+                                      <p:cBhvr>
+                                        <p:cTn id="41" dur="2000" fill="hold"/>
+                                        <p:tgtEl>
+                                          <p:spTgt spid="5"/>
+                                        </p:tgtEl>
+                                        <p:attrNameLst>
+                                          <p:attrName>ppt_w</p:attrName>
+                                        </p:attrNameLst>
+                                      </p:cBhvr>
+                                      <p:tavLst>
+                                        <p:tav tm="0" fmla="#ppt_w*sin(2.5*pi*$)">
+                                          <p:val>
+                                            <p:fltVal val="0"/>
+                                          </p:val>
+                                        </p:tav>
+                                        <p:tav tm="100000">
+                                          <p:val>
+                                            <p:fltVal val="1"/>
+                                          </p:val>
+                                        </p:tav>
+                                      </p:tavLst>
+                                    </p:anim>
+                                    <p:anim calcmode="lin" valueType="num">
+                                      <p:cBhvr>
+                                        <p:cTn id="42" dur="2000" fill="hold"/>
+                                        <p:tgtEl>
+                                          <p:spTgt spid="5"/>
+                                        </p:tgtEl>
+                                        <p:attrNameLst>
+                                          <p:attrName>ppt_h</p:attrName>
+                                        </p:attrNameLst>
+                                      </p:cBhvr>
+                                      <p:tavLst>
+                                        <p:tav tm="0">
+                                          <p:val>
+                                            <p:strVal val="#ppt_h"/>
+                                          </p:val>
+                                        </p:tav>
+                                        <p:tav tm="100000">
+                                          <p:val>
+                                            <p:strVal val="#ppt_h"/>
+                                          </p:val>
+                                        </p:tav>
+                                      </p:tavLst>
+                                    </p:anim>
                                   </p:childTnLst>
                                 </p:cTn>
                               </p:par>
@@ -7861,26 +8355,336 @@
       </p:sp>
       <p:sp>
         <p:nvSpPr>
-          <p:cNvPr id="3" name="Alcím 2">
+          <p:cNvPr id="4" name="Rectangle 1">
             <a:extLst>
               <a:ext uri="{FF2B5EF4-FFF2-40B4-BE49-F238E27FC236}">
-                <a16:creationId xmlns:a16="http://schemas.microsoft.com/office/drawing/2014/main" id="{06E364E7-E178-4DBF-9AE6-889361549F70}"/>
+                <a16:creationId xmlns:a16="http://schemas.microsoft.com/office/drawing/2014/main" id="{09B5245B-9DEC-4DE0-A80C-00405B3A5348}"/>
               </a:ext>
             </a:extLst>
           </p:cNvPr>
           <p:cNvSpPr>
-            <a:spLocks noGrp="1"/>
+            <a:spLocks noGrp="1" noChangeArrowheads="1"/>
           </p:cNvSpPr>
           <p:nvPr>
             <p:ph type="subTitle" idx="1"/>
           </p:nvPr>
         </p:nvSpPr>
-        <p:spPr/>
-        <p:txBody>
-          <a:bodyPr/>
+        <p:spPr bwMode="auto">
+          <a:xfrm>
+            <a:off x="2545459" y="3471337"/>
+            <a:ext cx="7101082" cy="1815882"/>
+          </a:xfrm>
+          <a:prstGeom prst="rect">
+            <a:avLst/>
+          </a:prstGeom>
+          <a:noFill/>
+          <a:ln>
+            <a:noFill/>
+          </a:ln>
+          <a:effectLst/>
+          <a:extLst>
+            <a:ext uri="{909E8E84-426E-40DD-AFC4-6F175D3DCCD1}">
+              <a14:hiddenFill xmlns:a14="http://schemas.microsoft.com/office/drawing/2010/main">
+                <a:solidFill>
+                  <a:schemeClr val="accent1"/>
+                </a:solidFill>
+              </a14:hiddenFill>
+            </a:ext>
+            <a:ext uri="{91240B29-F687-4F45-9708-019B960494DF}">
+              <a14:hiddenLine xmlns:a14="http://schemas.microsoft.com/office/drawing/2010/main" w="9525">
+                <a:solidFill>
+                  <a:schemeClr val="tx1"/>
+                </a:solidFill>
+                <a:miter lim="800000"/>
+                <a:headEnd/>
+                <a:tailEnd/>
+              </a14:hiddenLine>
+            </a:ext>
+            <a:ext uri="{AF507438-7753-43E0-B8FC-AC1667EBCBE1}">
+              <a14:hiddenEffects xmlns:a14="http://schemas.microsoft.com/office/drawing/2010/main">
+                <a:effectLst>
+                  <a:outerShdw dist="35921" dir="2700000" algn="ctr" rotWithShape="0">
+                    <a:schemeClr val="bg2"/>
+                  </a:outerShdw>
+                </a:effectLst>
+              </a14:hiddenEffects>
+            </a:ext>
+          </a:extLst>
+        </p:spPr>
+        <p:txBody>
+          <a:bodyPr vert="horz" wrap="square" lIns="91440" tIns="45720" rIns="91440" bIns="45720" numCol="1" anchor="ctr" anchorCtr="0" compatLnSpc="1">
+            <a:prstTxWarp prst="textNoShape">
+              <a:avLst/>
+            </a:prstTxWarp>
+            <a:spAutoFit/>
+          </a:bodyPr>
           <a:lstStyle/>
           <a:p>
-            <a:endParaRPr lang="hu-HU" dirty="0"/>
+            <a:pPr marL="0" marR="0" lvl="0" indent="0" algn="l" defTabSz="914400" rtl="0" eaLnBrk="0" fontAlgn="base" latinLnBrk="0" hangingPunct="0">
+              <a:lnSpc>
+                <a:spcPct val="100000"/>
+              </a:lnSpc>
+              <a:spcBef>
+                <a:spcPct val="0"/>
+              </a:spcBef>
+              <a:spcAft>
+                <a:spcPct val="0"/>
+              </a:spcAft>
+              <a:buClrTx/>
+              <a:buSzTx/>
+              <a:buFontTx/>
+              <a:buChar char="•"/>
+              <a:tabLst/>
+            </a:pPr>
+            <a:r>
+              <a:rPr kumimoji="0" lang="hu-HU" altLang="hu-HU" sz="1600" b="1" i="0" u="none" strike="noStrike" cap="none" normalizeH="0" baseline="0" dirty="0">
+                <a:ln>
+                  <a:noFill/>
+                </a:ln>
+                <a:solidFill>
+                  <a:schemeClr val="tx1"/>
+                </a:solidFill>
+                <a:effectLst/>
+                <a:latin typeface="Arial" panose="020B0604020202020204" pitchFamily="34" charset="0"/>
+                <a:cs typeface="Arial" panose="020B0604020202020204" pitchFamily="34" charset="0"/>
+              </a:rPr>
+              <a:t>Rugalmas nyelvek:</a:t>
+            </a:r>
+            <a:r>
+              <a:rPr kumimoji="0" lang="hu-HU" altLang="hu-HU" sz="1600" b="0" i="0" u="none" strike="noStrike" cap="none" normalizeH="0" baseline="0" dirty="0">
+                <a:ln>
+                  <a:noFill/>
+                </a:ln>
+                <a:solidFill>
+                  <a:schemeClr val="tx1"/>
+                </a:solidFill>
+                <a:effectLst/>
+                <a:latin typeface="Arial" panose="020B0604020202020204" pitchFamily="34" charset="0"/>
+                <a:cs typeface="Arial" panose="020B0604020202020204" pitchFamily="34" charset="0"/>
+              </a:rPr>
+              <a:t> Egyszerű, típusmegadás nélküli kódolás (Python, JS, PHP).</a:t>
+            </a:r>
+          </a:p>
+          <a:p>
+            <a:pPr marL="0" marR="0" lvl="0" indent="0" algn="l" defTabSz="914400" rtl="0" eaLnBrk="0" fontAlgn="base" latinLnBrk="0" hangingPunct="0">
+              <a:lnSpc>
+                <a:spcPct val="100000"/>
+              </a:lnSpc>
+              <a:spcBef>
+                <a:spcPct val="0"/>
+              </a:spcBef>
+              <a:spcAft>
+                <a:spcPct val="0"/>
+              </a:spcAft>
+              <a:buClrTx/>
+              <a:buSzTx/>
+              <a:buFontTx/>
+              <a:buChar char="•"/>
+              <a:tabLst/>
+            </a:pPr>
+            <a:r>
+              <a:rPr kumimoji="0" lang="hu-HU" altLang="hu-HU" sz="1600" b="1" i="0" u="none" strike="noStrike" cap="none" normalizeH="0" baseline="0" dirty="0">
+                <a:ln>
+                  <a:noFill/>
+                </a:ln>
+                <a:solidFill>
+                  <a:schemeClr val="tx1"/>
+                </a:solidFill>
+                <a:effectLst/>
+                <a:latin typeface="Arial" panose="020B0604020202020204" pitchFamily="34" charset="0"/>
+                <a:cs typeface="Arial" panose="020B0604020202020204" pitchFamily="34" charset="0"/>
+              </a:rPr>
+              <a:t>Szintaktikai apróságok:</a:t>
+            </a:r>
+            <a:r>
+              <a:rPr kumimoji="0" lang="hu-HU" altLang="hu-HU" sz="1600" b="0" i="0" u="none" strike="noStrike" cap="none" normalizeH="0" baseline="0" dirty="0">
+                <a:ln>
+                  <a:noFill/>
+                </a:ln>
+                <a:solidFill>
+                  <a:schemeClr val="tx1"/>
+                </a:solidFill>
+                <a:effectLst/>
+                <a:latin typeface="Arial" panose="020B0604020202020204" pitchFamily="34" charset="0"/>
+                <a:cs typeface="Arial" panose="020B0604020202020204" pitchFamily="34" charset="0"/>
+              </a:rPr>
+              <a:t> a JS-ben </a:t>
+            </a:r>
+            <a:r>
+              <a:rPr kumimoji="0" lang="hu-HU" altLang="hu-HU" sz="1600" b="0" i="0" u="none" strike="noStrike" cap="none" normalizeH="0" baseline="0" dirty="0" err="1">
+                <a:ln>
+                  <a:noFill/>
+                </a:ln>
+                <a:solidFill>
+                  <a:schemeClr val="tx1"/>
+                </a:solidFill>
+                <a:effectLst/>
+                <a:latin typeface="Arial" panose="020B0604020202020204" pitchFamily="34" charset="0"/>
+                <a:cs typeface="Arial" panose="020B0604020202020204" pitchFamily="34" charset="0"/>
+              </a:rPr>
+              <a:t>let</a:t>
+            </a:r>
+            <a:r>
+              <a:rPr kumimoji="0" lang="hu-HU" altLang="hu-HU" sz="1600" b="0" i="0" u="none" strike="noStrike" cap="none" normalizeH="0" baseline="0" dirty="0">
+                <a:ln>
+                  <a:noFill/>
+                </a:ln>
+                <a:solidFill>
+                  <a:schemeClr val="tx1"/>
+                </a:solidFill>
+                <a:effectLst/>
+                <a:latin typeface="Arial" panose="020B0604020202020204" pitchFamily="34" charset="0"/>
+                <a:cs typeface="Arial" panose="020B0604020202020204" pitchFamily="34" charset="0"/>
+              </a:rPr>
+              <a:t> kulcsszóra és a PHP-ben $ jelére kell figyelni.</a:t>
+            </a:r>
+          </a:p>
+          <a:p>
+            <a:pPr marL="0" marR="0" lvl="0" indent="0" algn="l" defTabSz="914400" rtl="0" eaLnBrk="0" fontAlgn="base" latinLnBrk="0" hangingPunct="0">
+              <a:lnSpc>
+                <a:spcPct val="100000"/>
+              </a:lnSpc>
+              <a:spcBef>
+                <a:spcPct val="0"/>
+              </a:spcBef>
+              <a:spcAft>
+                <a:spcPct val="0"/>
+              </a:spcAft>
+              <a:buClrTx/>
+              <a:buSzTx/>
+              <a:buFontTx/>
+              <a:buChar char="•"/>
+              <a:tabLst/>
+            </a:pPr>
+            <a:r>
+              <a:rPr kumimoji="0" lang="hu-HU" altLang="hu-HU" sz="1600" b="1" i="0" u="none" strike="noStrike" cap="none" normalizeH="0" baseline="0" dirty="0">
+                <a:ln>
+                  <a:noFill/>
+                </a:ln>
+                <a:solidFill>
+                  <a:schemeClr val="tx1"/>
+                </a:solidFill>
+                <a:effectLst/>
+                <a:latin typeface="Arial" panose="020B0604020202020204" pitchFamily="34" charset="0"/>
+                <a:cs typeface="Arial" panose="020B0604020202020204" pitchFamily="34" charset="0"/>
+              </a:rPr>
+              <a:t>Szigorú C#:</a:t>
+            </a:r>
+            <a:r>
+              <a:rPr kumimoji="0" lang="hu-HU" altLang="hu-HU" sz="1600" b="0" i="0" u="none" strike="noStrike" cap="none" normalizeH="0" baseline="0" dirty="0">
+                <a:ln>
+                  <a:noFill/>
+                </a:ln>
+                <a:solidFill>
+                  <a:schemeClr val="tx1"/>
+                </a:solidFill>
+                <a:effectLst/>
+                <a:latin typeface="Arial" panose="020B0604020202020204" pitchFamily="34" charset="0"/>
+                <a:cs typeface="Arial" panose="020B0604020202020204" pitchFamily="34" charset="0"/>
+              </a:rPr>
+              <a:t> Kötelező az adattípus pl. int előzetes </a:t>
+            </a:r>
+            <a:r>
+              <a:rPr kumimoji="0" lang="hu-HU" altLang="hu-HU" sz="1600" b="0" i="0" u="none" strike="noStrike" cap="none" normalizeH="0" baseline="0" dirty="0" err="1">
+                <a:ln>
+                  <a:noFill/>
+                </a:ln>
+                <a:solidFill>
+                  <a:schemeClr val="tx1"/>
+                </a:solidFill>
+                <a:effectLst/>
+                <a:latin typeface="Arial" panose="020B0604020202020204" pitchFamily="34" charset="0"/>
+                <a:cs typeface="Arial" panose="020B0604020202020204" pitchFamily="34" charset="0"/>
+              </a:rPr>
+              <a:t>kijelentese</a:t>
+            </a:r>
+            <a:r>
+              <a:rPr kumimoji="0" lang="hu-HU" altLang="hu-HU" sz="1600" b="0" i="0" u="none" strike="noStrike" cap="none" normalizeH="0" baseline="0" dirty="0">
+                <a:ln>
+                  <a:noFill/>
+                </a:ln>
+                <a:solidFill>
+                  <a:schemeClr val="tx1"/>
+                </a:solidFill>
+                <a:effectLst/>
+                <a:latin typeface="Arial" panose="020B0604020202020204" pitchFamily="34" charset="0"/>
+                <a:cs typeface="Arial" panose="020B0604020202020204" pitchFamily="34" charset="0"/>
+              </a:rPr>
+              <a:t>.</a:t>
+            </a:r>
+          </a:p>
+          <a:p>
+            <a:pPr marL="0" marR="0" lvl="0" indent="0" algn="l" defTabSz="914400" rtl="0" eaLnBrk="0" fontAlgn="base" latinLnBrk="0" hangingPunct="0">
+              <a:lnSpc>
+                <a:spcPct val="100000"/>
+              </a:lnSpc>
+              <a:spcBef>
+                <a:spcPct val="0"/>
+              </a:spcBef>
+              <a:spcAft>
+                <a:spcPct val="0"/>
+              </a:spcAft>
+              <a:buClrTx/>
+              <a:buSzTx/>
+              <a:buFontTx/>
+              <a:buChar char="•"/>
+              <a:tabLst/>
+            </a:pPr>
+            <a:r>
+              <a:rPr kumimoji="0" lang="hu-HU" altLang="hu-HU" sz="1600" b="1" i="0" u="none" strike="noStrike" cap="none" normalizeH="0" baseline="0" dirty="0">
+                <a:ln>
+                  <a:noFill/>
+                </a:ln>
+                <a:solidFill>
+                  <a:schemeClr val="tx1"/>
+                </a:solidFill>
+                <a:effectLst/>
+                <a:latin typeface="Arial" panose="020B0604020202020204" pitchFamily="34" charset="0"/>
+                <a:cs typeface="Arial" panose="020B0604020202020204" pitchFamily="34" charset="0"/>
+              </a:rPr>
+              <a:t>Katonás rend:</a:t>
+            </a:r>
+            <a:r>
+              <a:rPr kumimoji="0" lang="hu-HU" altLang="hu-HU" sz="1600" b="0" i="0" u="none" strike="noStrike" cap="none" normalizeH="0" baseline="0" dirty="0">
+                <a:ln>
+                  <a:noFill/>
+                </a:ln>
+                <a:solidFill>
+                  <a:schemeClr val="tx1"/>
+                </a:solidFill>
+                <a:effectLst/>
+                <a:latin typeface="Arial" panose="020B0604020202020204" pitchFamily="34" charset="0"/>
+                <a:cs typeface="Arial" panose="020B0604020202020204" pitchFamily="34" charset="0"/>
+              </a:rPr>
+              <a:t> Több gépelést igényel, de nagy projekteknél rengeteg problémát lehet vele </a:t>
+            </a:r>
+            <a:r>
+              <a:rPr kumimoji="0" lang="hu-HU" altLang="hu-HU" sz="1600" b="0" i="0" u="none" strike="noStrike" cap="none" normalizeH="0" baseline="0" dirty="0" err="1">
+                <a:ln>
+                  <a:noFill/>
+                </a:ln>
+                <a:solidFill>
+                  <a:schemeClr val="tx1"/>
+                </a:solidFill>
+                <a:effectLst/>
+                <a:latin typeface="Arial" panose="020B0604020202020204" pitchFamily="34" charset="0"/>
+                <a:cs typeface="Arial" panose="020B0604020202020204" pitchFamily="34" charset="0"/>
+              </a:rPr>
+              <a:t>elkerűlni</a:t>
+            </a:r>
+            <a:r>
+              <a:rPr kumimoji="0" lang="hu-HU" altLang="hu-HU" sz="1400" b="0" i="0" u="none" strike="noStrike" cap="none" normalizeH="0" baseline="0" dirty="0">
+                <a:ln>
+                  <a:noFill/>
+                </a:ln>
+                <a:solidFill>
+                  <a:schemeClr val="tx1"/>
+                </a:solidFill>
+                <a:effectLst/>
+                <a:latin typeface="Arial" panose="020B0604020202020204" pitchFamily="34" charset="0"/>
+              </a:rPr>
+              <a:t>.</a:t>
+            </a:r>
           </a:p>
         </p:txBody>
       </p:sp>
@@ -7894,13 +8698,13 @@
   <p:clrMapOvr>
     <a:masterClrMapping/>
   </p:clrMapOvr>
-  <mc:AlternateContent xmlns:mc="http://schemas.openxmlformats.org/markup-compatibility/2006">
-    <mc:Choice xmlns:p15="http://schemas.microsoft.com/office/powerpoint/2012/main" Requires="p15">
+  <mc:AlternateContent xmlns:mc="http://schemas.openxmlformats.org/markup-compatibility/2006" xmlns:p15="http://schemas.microsoft.com/office/powerpoint/2012/main">
+    <mc:Choice Requires="p15">
       <p:transition xmlns:p14="http://schemas.microsoft.com/office/powerpoint/2010/main" spd="slow" p14:dur="3250">
         <p15:prstTrans prst="origami"/>
       </p:transition>
     </mc:Choice>
-    <mc:Fallback>
+    <mc:Fallback xmlns="">
       <p:transition spd="slow">
         <p:fade/>
       </p:transition>
@@ -7967,163 +8771,37 @@
                       </p:childTnLst>
                     </p:cTn>
                   </p:par>
-                </p:childTnLst>
-              </p:cTn>
-              <p:prevCondLst>
-                <p:cond evt="onPrev" delay="0">
-                  <p:tgtEl>
-                    <p:sldTgt/>
-                  </p:tgtEl>
-                </p:cond>
-              </p:prevCondLst>
-              <p:nextCondLst>
-                <p:cond evt="onNext" delay="0">
-                  <p:tgtEl>
-                    <p:sldTgt/>
-                  </p:tgtEl>
-                </p:cond>
-              </p:nextCondLst>
-            </p:seq>
-          </p:childTnLst>
-        </p:cTn>
-      </p:par>
-    </p:tnLst>
-    <p:bldLst>
-      <p:bldP spid="2" grpId="0"/>
-    </p:bldLst>
-  </p:timing>
-</p:sld>
-</file>
-
-<file path=ppt/slides/slide6.xml><?xml version="1.0" encoding="utf-8"?>
-<p:sld xmlns:a="http://schemas.openxmlformats.org/drawingml/2006/main" xmlns:r="http://schemas.openxmlformats.org/officeDocument/2006/relationships" xmlns:p="http://schemas.openxmlformats.org/presentationml/2006/main">
-  <p:cSld>
-    <p:spTree>
-      <p:nvGrpSpPr>
-        <p:cNvPr id="1" name=""/>
-        <p:cNvGrpSpPr/>
-        <p:nvPr/>
-      </p:nvGrpSpPr>
-      <p:grpSpPr>
-        <a:xfrm>
-          <a:off x="0" y="0"/>
-          <a:ext cx="0" cy="0"/>
-          <a:chOff x="0" y="0"/>
-          <a:chExt cx="0" cy="0"/>
-        </a:xfrm>
-      </p:grpSpPr>
-      <p:sp>
-        <p:nvSpPr>
-          <p:cNvPr id="2" name="Cím 1">
-            <a:extLst>
-              <a:ext uri="{FF2B5EF4-FFF2-40B4-BE49-F238E27FC236}">
-                <a16:creationId xmlns:a16="http://schemas.microsoft.com/office/drawing/2014/main" id="{6E6962AA-0721-434D-9F10-489855FC485F}"/>
-              </a:ext>
-            </a:extLst>
-          </p:cNvPr>
-          <p:cNvSpPr>
-            <a:spLocks noGrp="1"/>
-          </p:cNvSpPr>
-          <p:nvPr>
-            <p:ph type="ctrTitle"/>
-          </p:nvPr>
-        </p:nvSpPr>
-        <p:spPr/>
-        <p:txBody>
-          <a:bodyPr/>
-          <a:lstStyle/>
-          <a:p>
-            <a:r>
-              <a:rPr lang="hu-HU" sz="4000" b="1" dirty="0"/>
-              <a:t>Összegzés</a:t>
-            </a:r>
-          </a:p>
-        </p:txBody>
-      </p:sp>
-      <p:sp>
-        <p:nvSpPr>
-          <p:cNvPr id="3" name="Alcím 2">
-            <a:extLst>
-              <a:ext uri="{FF2B5EF4-FFF2-40B4-BE49-F238E27FC236}">
-                <a16:creationId xmlns:a16="http://schemas.microsoft.com/office/drawing/2014/main" id="{5CEE03A6-7515-4C8C-9104-277DDFF3E599}"/>
-              </a:ext>
-            </a:extLst>
-          </p:cNvPr>
-          <p:cNvSpPr>
-            <a:spLocks noGrp="1"/>
-          </p:cNvSpPr>
-          <p:nvPr>
-            <p:ph type="subTitle" idx="1"/>
-          </p:nvPr>
-        </p:nvSpPr>
-        <p:spPr/>
-        <p:txBody>
-          <a:bodyPr>
-            <a:noAutofit/>
-          </a:bodyPr>
-          <a:lstStyle/>
-          <a:p>
-            <a:endParaRPr lang="hu-HU" sz="5000" dirty="0"/>
-          </a:p>
-        </p:txBody>
-      </p:sp>
-    </p:spTree>
-    <p:extLst>
-      <p:ext uri="{BB962C8B-B14F-4D97-AF65-F5344CB8AC3E}">
-        <p14:creationId xmlns:p14="http://schemas.microsoft.com/office/powerpoint/2010/main" val="2922484389"/>
-      </p:ext>
-    </p:extLst>
-  </p:cSld>
-  <p:clrMapOvr>
-    <a:masterClrMapping/>
-  </p:clrMapOvr>
-  <mc:AlternateContent xmlns:mc="http://schemas.openxmlformats.org/markup-compatibility/2006">
-    <mc:Choice xmlns:p15="http://schemas.microsoft.com/office/powerpoint/2012/main" Requires="p15">
-      <p:transition xmlns:p14="http://schemas.microsoft.com/office/powerpoint/2010/main" spd="slow" p14:dur="3250">
-        <p15:prstTrans prst="origami"/>
-      </p:transition>
-    </mc:Choice>
-    <mc:Fallback>
-      <p:transition spd="slow">
-        <p:fade/>
-      </p:transition>
-    </mc:Fallback>
-  </mc:AlternateContent>
-  <p:timing>
-    <p:tnLst>
-      <p:par>
-        <p:cTn id="1" dur="indefinite" restart="never" nodeType="tmRoot">
-          <p:childTnLst>
-            <p:seq concurrent="1" nextAc="seek">
-              <p:cTn id="2" dur="indefinite" nodeType="mainSeq">
-                <p:childTnLst>
                   <p:par>
-                    <p:cTn id="3" fill="hold">
+                    <p:cTn id="8" fill="hold">
                       <p:stCondLst>
                         <p:cond delay="indefinite"/>
                       </p:stCondLst>
                       <p:childTnLst>
                         <p:par>
-                          <p:cTn id="4" fill="hold">
+                          <p:cTn id="9" fill="hold">
                             <p:stCondLst>
                               <p:cond delay="0"/>
                             </p:stCondLst>
                             <p:childTnLst>
                               <p:par>
-                                <p:cTn id="5" presetID="45" presetClass="entr" presetSubtype="0" fill="hold" grpId="0" nodeType="clickEffect">
+                                <p:cTn id="10" presetID="26" presetClass="entr" presetSubtype="0" fill="hold" nodeType="clickEffect">
                                   <p:stCondLst>
                                     <p:cond delay="0"/>
                                   </p:stCondLst>
                                   <p:childTnLst>
                                     <p:set>
                                       <p:cBhvr>
-                                        <p:cTn id="6" dur="1" fill="hold">
+                                        <p:cTn id="11" dur="1" fill="hold">
                                           <p:stCondLst>
                                             <p:cond delay="0"/>
                                           </p:stCondLst>
                                         </p:cTn>
                                         <p:tgtEl>
-                                          <p:spTgt spid="2"/>
+                                          <p:spTgt spid="4">
+                                            <p:txEl>
+                                              <p:pRg st="0" end="0"/>
+                                            </p:txEl>
+                                          </p:spTgt>
                                         </p:tgtEl>
                                         <p:attrNameLst>
                                           <p:attrName>style.visibility</p:attrName>
@@ -8133,26 +8811,104 @@
                                         <p:strVal val="visible"/>
                                       </p:to>
                                     </p:set>
-                                    <p:animEffect transition="in" filter="fade">
-                                      <p:cBhvr>
-                                        <p:cTn id="7" dur="2000"/>
-                                        <p:tgtEl>
-                                          <p:spTgt spid="2"/>
+                                    <p:animEffect transition="in" filter="wipe(down)">
+                                      <p:cBhvr>
+                                        <p:cTn id="12" dur="580">
+                                          <p:stCondLst>
+                                            <p:cond delay="0"/>
+                                          </p:stCondLst>
+                                        </p:cTn>
+                                        <p:tgtEl>
+                                          <p:spTgt spid="4">
+                                            <p:txEl>
+                                              <p:pRg st="0" end="0"/>
+                                            </p:txEl>
+                                          </p:spTgt>
                                         </p:tgtEl>
                                       </p:cBhvr>
                                     </p:animEffect>
                                     <p:anim calcmode="lin" valueType="num">
                                       <p:cBhvr>
-                                        <p:cTn id="8" dur="2000" fill="hold"/>
-                                        <p:tgtEl>
-                                          <p:spTgt spid="2"/>
+                                        <p:cTn id="13" dur="1822" tmFilter="0,0; 0.14,0.36; 0.43,0.73; 0.71,0.91; 1.0,1.0">
+                                          <p:stCondLst>
+                                            <p:cond delay="0"/>
+                                          </p:stCondLst>
+                                        </p:cTn>
+                                        <p:tgtEl>
+                                          <p:spTgt spid="4">
+                                            <p:txEl>
+                                              <p:pRg st="0" end="0"/>
+                                            </p:txEl>
+                                          </p:spTgt>
                                         </p:tgtEl>
                                         <p:attrNameLst>
-                                          <p:attrName>ppt_w</p:attrName>
+                                          <p:attrName>ppt_x</p:attrName>
                                         </p:attrNameLst>
                                       </p:cBhvr>
                                       <p:tavLst>
-                                        <p:tav tm="0" fmla="#ppt_w*sin(2.5*pi*$)">
+                                        <p:tav tm="0">
+                                          <p:val>
+                                            <p:strVal val="#ppt_x-0.25"/>
+                                          </p:val>
+                                        </p:tav>
+                                        <p:tav tm="100000">
+                                          <p:val>
+                                            <p:strVal val="#ppt_x"/>
+                                          </p:val>
+                                        </p:tav>
+                                      </p:tavLst>
+                                    </p:anim>
+                                    <p:anim calcmode="lin" valueType="num">
+                                      <p:cBhvr>
+                                        <p:cTn id="14" dur="664" tmFilter="0.0,0.0; 0.25,0.07; 0.50,0.2; 0.75,0.467; 1.0,1.0">
+                                          <p:stCondLst>
+                                            <p:cond delay="0"/>
+                                          </p:stCondLst>
+                                        </p:cTn>
+                                        <p:tgtEl>
+                                          <p:spTgt spid="4">
+                                            <p:txEl>
+                                              <p:pRg st="0" end="0"/>
+                                            </p:txEl>
+                                          </p:spTgt>
+                                        </p:tgtEl>
+                                        <p:attrNameLst>
+                                          <p:attrName>ppt_y</p:attrName>
+                                        </p:attrNameLst>
+                                      </p:cBhvr>
+                                      <p:tavLst>
+                                        <p:tav tm="0" fmla="#ppt_y-sin(pi*$)/3">
+                                          <p:val>
+                                            <p:fltVal val="0.5"/>
+                                          </p:val>
+                                        </p:tav>
+                                        <p:tav tm="100000">
+                                          <p:val>
+                                            <p:fltVal val="1"/>
+                                          </p:val>
+                                        </p:tav>
+                                      </p:tavLst>
+                                    </p:anim>
+                                    <p:anim calcmode="lin" valueType="num">
+                                      <p:cBhvr>
+                                        <p:cTn id="15" dur="664" tmFilter="0, 0; 0.125,0.2665; 0.25,0.4; 0.375,0.465; 0.5,0.5;  0.625,0.535; 0.75,0.6; 0.875,0.7335; 1,1">
+                                          <p:stCondLst>
+                                            <p:cond delay="664"/>
+                                          </p:stCondLst>
+                                        </p:cTn>
+                                        <p:tgtEl>
+                                          <p:spTgt spid="4">
+                                            <p:txEl>
+                                              <p:pRg st="0" end="0"/>
+                                            </p:txEl>
+                                          </p:spTgt>
+                                        </p:tgtEl>
+                                        <p:attrNameLst>
+                                          <p:attrName>ppt_y</p:attrName>
+                                        </p:attrNameLst>
+                                      </p:cBhvr>
+                                      <p:tavLst>
+                                        <p:tav tm="0" fmla="#ppt_y-sin(pi*$)/9">
                                           <p:val>
                                             <p:fltVal val="0"/>
                                           </p:val>
@@ -8166,27 +8922,1216 @@
                                     </p:anim>
                                     <p:anim calcmode="lin" valueType="num">
                                       <p:cBhvr>
-                                        <p:cTn id="9" dur="2000" fill="hold"/>
-                                        <p:tgtEl>
-                                          <p:spTgt spid="2"/>
+                                        <p:cTn id="16" dur="332" tmFilter="0, 0; 0.125,0.2665; 0.25,0.4; 0.375,0.465; 0.5,0.5;  0.625,0.535; 0.75,0.6; 0.875,0.7335; 1,1">
+                                          <p:stCondLst>
+                                            <p:cond delay="1324"/>
+                                          </p:stCondLst>
+                                        </p:cTn>
+                                        <p:tgtEl>
+                                          <p:spTgt spid="4">
+                                            <p:txEl>
+                                              <p:pRg st="0" end="0"/>
+                                            </p:txEl>
+                                          </p:spTgt>
                                         </p:tgtEl>
                                         <p:attrNameLst>
-                                          <p:attrName>ppt_h</p:attrName>
+                                          <p:attrName>ppt_y</p:attrName>
                                         </p:attrNameLst>
                                       </p:cBhvr>
                                       <p:tavLst>
-                                        <p:tav tm="0">
+                                        <p:tav tm="0" fmla="#ppt_y-sin(pi*$)/27">
                                           <p:val>
-                                            <p:strVal val="#ppt_h"/>
+                                            <p:fltVal val="0"/>
                                           </p:val>
                                         </p:tav>
                                         <p:tav tm="100000">
                                           <p:val>
-                                            <p:strVal val="#ppt_h"/>
+                                            <p:fltVal val="1"/>
                                           </p:val>
                                         </p:tav>
                                       </p:tavLst>
                                     </p:anim>
+                                    <p:anim calcmode="lin" valueType="num">
+                                      <p:cBhvr>
+                                        <p:cTn id="17" dur="164" tmFilter="0, 0; 0.125,0.2665; 0.25,0.4; 0.375,0.465; 0.5,0.5;  0.625,0.535; 0.75,0.6; 0.875,0.7335; 1,1">
+                                          <p:stCondLst>
+                                            <p:cond delay="1656"/>
+                                          </p:stCondLst>
+                                        </p:cTn>
+                                        <p:tgtEl>
+                                          <p:spTgt spid="4">
+                                            <p:txEl>
+                                              <p:pRg st="0" end="0"/>
+                                            </p:txEl>
+                                          </p:spTgt>
+                                        </p:tgtEl>
+                                        <p:attrNameLst>
+                                          <p:attrName>ppt_y</p:attrName>
+                                        </p:attrNameLst>
+                                      </p:cBhvr>
+                                      <p:tavLst>
+                                        <p:tav tm="0" fmla="#ppt_y-sin(pi*$)/81">
+                                          <p:val>
+                                            <p:fltVal val="0"/>
+                                          </p:val>
+                                        </p:tav>
+                                        <p:tav tm="100000">
+                                          <p:val>
+                                            <p:fltVal val="1"/>
+                                          </p:val>
+                                        </p:tav>
+                                      </p:tavLst>
+                                    </p:anim>
+                                    <p:animScale>
+                                      <p:cBhvr>
+                                        <p:cTn id="18" dur="26">
+                                          <p:stCondLst>
+                                            <p:cond delay="650"/>
+                                          </p:stCondLst>
+                                        </p:cTn>
+                                        <p:tgtEl>
+                                          <p:spTgt spid="4">
+                                            <p:txEl>
+                                              <p:pRg st="0" end="0"/>
+                                            </p:txEl>
+                                          </p:spTgt>
+                                        </p:tgtEl>
+                                      </p:cBhvr>
+                                      <p:to x="100000" y="60000"/>
+                                    </p:animScale>
+                                    <p:animScale>
+                                      <p:cBhvr>
+                                        <p:cTn id="19" dur="166" decel="50000">
+                                          <p:stCondLst>
+                                            <p:cond delay="676"/>
+                                          </p:stCondLst>
+                                        </p:cTn>
+                                        <p:tgtEl>
+                                          <p:spTgt spid="4">
+                                            <p:txEl>
+                                              <p:pRg st="0" end="0"/>
+                                            </p:txEl>
+                                          </p:spTgt>
+                                        </p:tgtEl>
+                                      </p:cBhvr>
+                                      <p:to x="100000" y="100000"/>
+                                    </p:animScale>
+                                    <p:animScale>
+                                      <p:cBhvr>
+                                        <p:cTn id="20" dur="26">
+                                          <p:stCondLst>
+                                            <p:cond delay="1312"/>
+                                          </p:stCondLst>
+                                        </p:cTn>
+                                        <p:tgtEl>
+                                          <p:spTgt spid="4">
+                                            <p:txEl>
+                                              <p:pRg st="0" end="0"/>
+                                            </p:txEl>
+                                          </p:spTgt>
+                                        </p:tgtEl>
+                                      </p:cBhvr>
+                                      <p:to x="100000" y="80000"/>
+                                    </p:animScale>
+                                    <p:animScale>
+                                      <p:cBhvr>
+                                        <p:cTn id="21" dur="166" decel="50000">
+                                          <p:stCondLst>
+                                            <p:cond delay="1338"/>
+                                          </p:stCondLst>
+                                        </p:cTn>
+                                        <p:tgtEl>
+                                          <p:spTgt spid="4">
+                                            <p:txEl>
+                                              <p:pRg st="0" end="0"/>
+                                            </p:txEl>
+                                          </p:spTgt>
+                                        </p:tgtEl>
+                                      </p:cBhvr>
+                                      <p:to x="100000" y="100000"/>
+                                    </p:animScale>
+                                    <p:animScale>
+                                      <p:cBhvr>
+                                        <p:cTn id="22" dur="26">
+                                          <p:stCondLst>
+                                            <p:cond delay="1642"/>
+                                          </p:stCondLst>
+                                        </p:cTn>
+                                        <p:tgtEl>
+                                          <p:spTgt spid="4">
+                                            <p:txEl>
+                                              <p:pRg st="0" end="0"/>
+                                            </p:txEl>
+                                          </p:spTgt>
+                                        </p:tgtEl>
+                                      </p:cBhvr>
+                                      <p:to x="100000" y="90000"/>
+                                    </p:animScale>
+                                    <p:animScale>
+                                      <p:cBhvr>
+                                        <p:cTn id="23" dur="166" decel="50000">
+                                          <p:stCondLst>
+                                            <p:cond delay="1668"/>
+                                          </p:stCondLst>
+                                        </p:cTn>
+                                        <p:tgtEl>
+                                          <p:spTgt spid="4">
+                                            <p:txEl>
+                                              <p:pRg st="0" end="0"/>
+                                            </p:txEl>
+                                          </p:spTgt>
+                                        </p:tgtEl>
+                                      </p:cBhvr>
+                                      <p:to x="100000" y="100000"/>
+                                    </p:animScale>
+                                    <p:animScale>
+                                      <p:cBhvr>
+                                        <p:cTn id="24" dur="26">
+                                          <p:stCondLst>
+                                            <p:cond delay="1808"/>
+                                          </p:stCondLst>
+                                        </p:cTn>
+                                        <p:tgtEl>
+                                          <p:spTgt spid="4">
+                                            <p:txEl>
+                                              <p:pRg st="0" end="0"/>
+                                            </p:txEl>
+                                          </p:spTgt>
+                                        </p:tgtEl>
+                                      </p:cBhvr>
+                                      <p:to x="100000" y="95000"/>
+                                    </p:animScale>
+                                    <p:animScale>
+                                      <p:cBhvr>
+                                        <p:cTn id="25" dur="166" decel="50000">
+                                          <p:stCondLst>
+                                            <p:cond delay="1834"/>
+                                          </p:stCondLst>
+                                        </p:cTn>
+                                        <p:tgtEl>
+                                          <p:spTgt spid="4">
+                                            <p:txEl>
+                                              <p:pRg st="0" end="0"/>
+                                            </p:txEl>
+                                          </p:spTgt>
+                                        </p:tgtEl>
+                                      </p:cBhvr>
+                                      <p:to x="100000" y="100000"/>
+                                    </p:animScale>
+                                  </p:childTnLst>
+                                </p:cTn>
+                              </p:par>
+                              <p:par>
+                                <p:cTn id="26" presetID="26" presetClass="entr" presetSubtype="0" fill="hold" nodeType="withEffect">
+                                  <p:stCondLst>
+                                    <p:cond delay="0"/>
+                                  </p:stCondLst>
+                                  <p:childTnLst>
+                                    <p:set>
+                                      <p:cBhvr>
+                                        <p:cTn id="27" dur="1" fill="hold">
+                                          <p:stCondLst>
+                                            <p:cond delay="0"/>
+                                          </p:stCondLst>
+                                        </p:cTn>
+                                        <p:tgtEl>
+                                          <p:spTgt spid="4">
+                                            <p:txEl>
+                                              <p:pRg st="1" end="1"/>
+                                            </p:txEl>
+                                          </p:spTgt>
+                                        </p:tgtEl>
+                                        <p:attrNameLst>
+                                          <p:attrName>style.visibility</p:attrName>
+                                        </p:attrNameLst>
+                                      </p:cBhvr>
+                                      <p:to>
+                                        <p:strVal val="visible"/>
+                                      </p:to>
+                                    </p:set>
+                                    <p:animEffect transition="in" filter="wipe(down)">
+                                      <p:cBhvr>
+                                        <p:cTn id="28" dur="580">
+                                          <p:stCondLst>
+                                            <p:cond delay="0"/>
+                                          </p:stCondLst>
+                                        </p:cTn>
+                                        <p:tgtEl>
+                                          <p:spTgt spid="4">
+                                            <p:txEl>
+                                              <p:pRg st="1" end="1"/>
+                                            </p:txEl>
+                                          </p:spTgt>
+                                        </p:tgtEl>
+                                      </p:cBhvr>
+                                    </p:animEffect>
+                                    <p:anim calcmode="lin" valueType="num">
+                                      <p:cBhvr>
+                                        <p:cTn id="29" dur="1822" tmFilter="0,0; 0.14,0.36; 0.43,0.73; 0.71,0.91; 1.0,1.0">
+                                          <p:stCondLst>
+                                            <p:cond delay="0"/>
+                                          </p:stCondLst>
+                                        </p:cTn>
+                                        <p:tgtEl>
+                                          <p:spTgt spid="4">
+                                            <p:txEl>
+                                              <p:pRg st="1" end="1"/>
+                                            </p:txEl>
+                                          </p:spTgt>
+                                        </p:tgtEl>
+                                        <p:attrNameLst>
+                                          <p:attrName>ppt_x</p:attrName>
+                                        </p:attrNameLst>
+                                      </p:cBhvr>
+                                      <p:tavLst>
+                                        <p:tav tm="0">
+                                          <p:val>
+                                            <p:strVal val="#ppt_x-0.25"/>
+                                          </p:val>
+                                        </p:tav>
+                                        <p:tav tm="100000">
+                                          <p:val>
+                                            <p:strVal val="#ppt_x"/>
+                                          </p:val>
+                                        </p:tav>
+                                      </p:tavLst>
+                                    </p:anim>
+                                    <p:anim calcmode="lin" valueType="num">
+                                      <p:cBhvr>
+                                        <p:cTn id="30" dur="664" tmFilter="0.0,0.0; 0.25,0.07; 0.50,0.2; 0.75,0.467; 1.0,1.0">
+                                          <p:stCondLst>
+                                            <p:cond delay="0"/>
+                                          </p:stCondLst>
+                                        </p:cTn>
+                                        <p:tgtEl>
+                                          <p:spTgt spid="4">
+                                            <p:txEl>
+                                              <p:pRg st="1" end="1"/>
+                                            </p:txEl>
+                                          </p:spTgt>
+                                        </p:tgtEl>
+                                        <p:attrNameLst>
+                                          <p:attrName>ppt_y</p:attrName>
+                                        </p:attrNameLst>
+                                      </p:cBhvr>
+                                      <p:tavLst>
+                                        <p:tav tm="0" fmla="#ppt_y-sin(pi*$)/3">
+                                          <p:val>
+                                            <p:fltVal val="0.5"/>
+                                          </p:val>
+                                        </p:tav>
+                                        <p:tav tm="100000">
+                                          <p:val>
+                                            <p:fltVal val="1"/>
+                                          </p:val>
+                                        </p:tav>
+                                      </p:tavLst>
+                                    </p:anim>
+                                    <p:anim calcmode="lin" valueType="num">
+                                      <p:cBhvr>
+                                        <p:cTn id="31" dur="664" tmFilter="0, 0; 0.125,0.2665; 0.25,0.4; 0.375,0.465; 0.5,0.5;  0.625,0.535; 0.75,0.6; 0.875,0.7335; 1,1">
+                                          <p:stCondLst>
+                                            <p:cond delay="664"/>
+                                          </p:stCondLst>
+                                        </p:cTn>
+                                        <p:tgtEl>
+                                          <p:spTgt spid="4">
+                                            <p:txEl>
+                                              <p:pRg st="1" end="1"/>
+                                            </p:txEl>
+                                          </p:spTgt>
+                                        </p:tgtEl>
+                                        <p:attrNameLst>
+                                          <p:attrName>ppt_y</p:attrName>
+                                        </p:attrNameLst>
+                                      </p:cBhvr>
+                                      <p:tavLst>
+                                        <p:tav tm="0" fmla="#ppt_y-sin(pi*$)/9">
+                                          <p:val>
+                                            <p:fltVal val="0"/>
+                                          </p:val>
+                                        </p:tav>
+                                        <p:tav tm="100000">
+                                          <p:val>
+                                            <p:fltVal val="1"/>
+                                          </p:val>
+                                        </p:tav>
+                                      </p:tavLst>
+                                    </p:anim>
+                                    <p:anim calcmode="lin" valueType="num">
+                                      <p:cBhvr>
+                                        <p:cTn id="32" dur="332" tmFilter="0, 0; 0.125,0.2665; 0.25,0.4; 0.375,0.465; 0.5,0.5;  0.625,0.535; 0.75,0.6; 0.875,0.7335; 1,1">
+                                          <p:stCondLst>
+                                            <p:cond delay="1324"/>
+                                          </p:stCondLst>
+                                        </p:cTn>
+                                        <p:tgtEl>
+                                          <p:spTgt spid="4">
+                                            <p:txEl>
+                                              <p:pRg st="1" end="1"/>
+                                            </p:txEl>
+                                          </p:spTgt>
+                                        </p:tgtEl>
+                                        <p:attrNameLst>
+                                          <p:attrName>ppt_y</p:attrName>
+                                        </p:attrNameLst>
+                                      </p:cBhvr>
+                                      <p:tavLst>
+                                        <p:tav tm="0" fmla="#ppt_y-sin(pi*$)/27">
+                                          <p:val>
+                                            <p:fltVal val="0"/>
+                                          </p:val>
+                                        </p:tav>
+                                        <p:tav tm="100000">
+                                          <p:val>
+                                            <p:fltVal val="1"/>
+                                          </p:val>
+                                        </p:tav>
+                                      </p:tavLst>
+                                    </p:anim>
+                                    <p:anim calcmode="lin" valueType="num">
+                                      <p:cBhvr>
+                                        <p:cTn id="33" dur="164" tmFilter="0, 0; 0.125,0.2665; 0.25,0.4; 0.375,0.465; 0.5,0.5;  0.625,0.535; 0.75,0.6; 0.875,0.7335; 1,1">
+                                          <p:stCondLst>
+                                            <p:cond delay="1656"/>
+                                          </p:stCondLst>
+                                        </p:cTn>
+                                        <p:tgtEl>
+                                          <p:spTgt spid="4">
+                                            <p:txEl>
+                                              <p:pRg st="1" end="1"/>
+                                            </p:txEl>
+                                          </p:spTgt>
+                                        </p:tgtEl>
+                                        <p:attrNameLst>
+                                          <p:attrName>ppt_y</p:attrName>
+                                        </p:attrNameLst>
+                                      </p:cBhvr>
+                                      <p:tavLst>
+                                        <p:tav tm="0" fmla="#ppt_y-sin(pi*$)/81">
+                                          <p:val>
+                                            <p:fltVal val="0"/>
+                                          </p:val>
+                                        </p:tav>
+                                        <p:tav tm="100000">
+                                          <p:val>
+                                            <p:fltVal val="1"/>
+                                          </p:val>
+                                        </p:tav>
+                                      </p:tavLst>
+                                    </p:anim>
+                                    <p:animScale>
+                                      <p:cBhvr>
+                                        <p:cTn id="34" dur="26">
+                                          <p:stCondLst>
+                                            <p:cond delay="650"/>
+                                          </p:stCondLst>
+                                        </p:cTn>
+                                        <p:tgtEl>
+                                          <p:spTgt spid="4">
+                                            <p:txEl>
+                                              <p:pRg st="1" end="1"/>
+                                            </p:txEl>
+                                          </p:spTgt>
+                                        </p:tgtEl>
+                                      </p:cBhvr>
+                                      <p:to x="100000" y="60000"/>
+                                    </p:animScale>
+                                    <p:animScale>
+                                      <p:cBhvr>
+                                        <p:cTn id="35" dur="166" decel="50000">
+                                          <p:stCondLst>
+                                            <p:cond delay="676"/>
+                                          </p:stCondLst>
+                                        </p:cTn>
+                                        <p:tgtEl>
+                                          <p:spTgt spid="4">
+                                            <p:txEl>
+                                              <p:pRg st="1" end="1"/>
+                                            </p:txEl>
+                                          </p:spTgt>
+                                        </p:tgtEl>
+                                      </p:cBhvr>
+                                      <p:to x="100000" y="100000"/>
+                                    </p:animScale>
+                                    <p:animScale>
+                                      <p:cBhvr>
+                                        <p:cTn id="36" dur="26">
+                                          <p:stCondLst>
+                                            <p:cond delay="1312"/>
+                                          </p:stCondLst>
+                                        </p:cTn>
+                                        <p:tgtEl>
+                                          <p:spTgt spid="4">
+                                            <p:txEl>
+                                              <p:pRg st="1" end="1"/>
+                                            </p:txEl>
+                                          </p:spTgt>
+                                        </p:tgtEl>
+                                      </p:cBhvr>
+                                      <p:to x="100000" y="80000"/>
+                                    </p:animScale>
+                                    <p:animScale>
+                                      <p:cBhvr>
+                                        <p:cTn id="37" dur="166" decel="50000">
+                                          <p:stCondLst>
+                                            <p:cond delay="1338"/>
+                                          </p:stCondLst>
+                                        </p:cTn>
+                                        <p:tgtEl>
+                                          <p:spTgt spid="4">
+                                            <p:txEl>
+                                              <p:pRg st="1" end="1"/>
+                                            </p:txEl>
+                                          </p:spTgt>
+                                        </p:tgtEl>
+                                      </p:cBhvr>
+                                      <p:to x="100000" y="100000"/>
+                                    </p:animScale>
+                                    <p:animScale>
+                                      <p:cBhvr>
+                                        <p:cTn id="38" dur="26">
+                                          <p:stCondLst>
+                                            <p:cond delay="1642"/>
+                                          </p:stCondLst>
+                                        </p:cTn>
+                                        <p:tgtEl>
+                                          <p:spTgt spid="4">
+                                            <p:txEl>
+                                              <p:pRg st="1" end="1"/>
+                                            </p:txEl>
+                                          </p:spTgt>
+                                        </p:tgtEl>
+                                      </p:cBhvr>
+                                      <p:to x="100000" y="90000"/>
+                                    </p:animScale>
+                                    <p:animScale>
+                                      <p:cBhvr>
+                                        <p:cTn id="39" dur="166" decel="50000">
+                                          <p:stCondLst>
+                                            <p:cond delay="1668"/>
+                                          </p:stCondLst>
+                                        </p:cTn>
+                                        <p:tgtEl>
+                                          <p:spTgt spid="4">
+                                            <p:txEl>
+                                              <p:pRg st="1" end="1"/>
+                                            </p:txEl>
+                                          </p:spTgt>
+                                        </p:tgtEl>
+                                      </p:cBhvr>
+                                      <p:to x="100000" y="100000"/>
+                                    </p:animScale>
+                                    <p:animScale>
+                                      <p:cBhvr>
+                                        <p:cTn id="40" dur="26">
+                                          <p:stCondLst>
+                                            <p:cond delay="1808"/>
+                                          </p:stCondLst>
+                                        </p:cTn>
+                                        <p:tgtEl>
+                                          <p:spTgt spid="4">
+                                            <p:txEl>
+                                              <p:pRg st="1" end="1"/>
+                                            </p:txEl>
+                                          </p:spTgt>
+                                        </p:tgtEl>
+                                      </p:cBhvr>
+                                      <p:to x="100000" y="95000"/>
+                                    </p:animScale>
+                                    <p:animScale>
+                                      <p:cBhvr>
+                                        <p:cTn id="41" dur="166" decel="50000">
+                                          <p:stCondLst>
+                                            <p:cond delay="1834"/>
+                                          </p:stCondLst>
+                                        </p:cTn>
+                                        <p:tgtEl>
+                                          <p:spTgt spid="4">
+                                            <p:txEl>
+                                              <p:pRg st="1" end="1"/>
+                                            </p:txEl>
+                                          </p:spTgt>
+                                        </p:tgtEl>
+                                      </p:cBhvr>
+                                      <p:to x="100000" y="100000"/>
+                                    </p:animScale>
+                                  </p:childTnLst>
+                                </p:cTn>
+                              </p:par>
+                              <p:par>
+                                <p:cTn id="42" presetID="26" presetClass="entr" presetSubtype="0" fill="hold" nodeType="withEffect">
+                                  <p:stCondLst>
+                                    <p:cond delay="0"/>
+                                  </p:stCondLst>
+                                  <p:childTnLst>
+                                    <p:set>
+                                      <p:cBhvr>
+                                        <p:cTn id="43" dur="1" fill="hold">
+                                          <p:stCondLst>
+                                            <p:cond delay="0"/>
+                                          </p:stCondLst>
+                                        </p:cTn>
+                                        <p:tgtEl>
+                                          <p:spTgt spid="4">
+                                            <p:txEl>
+                                              <p:pRg st="2" end="2"/>
+                                            </p:txEl>
+                                          </p:spTgt>
+                                        </p:tgtEl>
+                                        <p:attrNameLst>
+                                          <p:attrName>style.visibility</p:attrName>
+                                        </p:attrNameLst>
+                                      </p:cBhvr>
+                                      <p:to>
+                                        <p:strVal val="visible"/>
+                                      </p:to>
+                                    </p:set>
+                                    <p:animEffect transition="in" filter="wipe(down)">
+                                      <p:cBhvr>
+                                        <p:cTn id="44" dur="580">
+                                          <p:stCondLst>
+                                            <p:cond delay="0"/>
+                                          </p:stCondLst>
+                                        </p:cTn>
+                                        <p:tgtEl>
+                                          <p:spTgt spid="4">
+                                            <p:txEl>
+                                              <p:pRg st="2" end="2"/>
+                                            </p:txEl>
+                                          </p:spTgt>
+                                        </p:tgtEl>
+                                      </p:cBhvr>
+                                    </p:animEffect>
+                                    <p:anim calcmode="lin" valueType="num">
+                                      <p:cBhvr>
+                                        <p:cTn id="45" dur="1822" tmFilter="0,0; 0.14,0.36; 0.43,0.73; 0.71,0.91; 1.0,1.0">
+                                          <p:stCondLst>
+                                            <p:cond delay="0"/>
+                                          </p:stCondLst>
+                                        </p:cTn>
+                                        <p:tgtEl>
+                                          <p:spTgt spid="4">
+                                            <p:txEl>
+                                              <p:pRg st="2" end="2"/>
+                                            </p:txEl>
+                                          </p:spTgt>
+                                        </p:tgtEl>
+                                        <p:attrNameLst>
+                                          <p:attrName>ppt_x</p:attrName>
+                                        </p:attrNameLst>
+                                      </p:cBhvr>
+                                      <p:tavLst>
+                                        <p:tav tm="0">
+                                          <p:val>
+                                            <p:strVal val="#ppt_x-0.25"/>
+                                          </p:val>
+                                        </p:tav>
+                                        <p:tav tm="100000">
+                                          <p:val>
+                                            <p:strVal val="#ppt_x"/>
+                                          </p:val>
+                                        </p:tav>
+                                      </p:tavLst>
+                                    </p:anim>
+                                    <p:anim calcmode="lin" valueType="num">
+                                      <p:cBhvr>
+                                        <p:cTn id="46" dur="664" tmFilter="0.0,0.0; 0.25,0.07; 0.50,0.2; 0.75,0.467; 1.0,1.0">
+                                          <p:stCondLst>
+                                            <p:cond delay="0"/>
+                                          </p:stCondLst>
+                                        </p:cTn>
+                                        <p:tgtEl>
+                                          <p:spTgt spid="4">
+                                            <p:txEl>
+                                              <p:pRg st="2" end="2"/>
+                                            </p:txEl>
+                                          </p:spTgt>
+                                        </p:tgtEl>
+                                        <p:attrNameLst>
+                                          <p:attrName>ppt_y</p:attrName>
+                                        </p:attrNameLst>
+                                      </p:cBhvr>
+                                      <p:tavLst>
+                                        <p:tav tm="0" fmla="#ppt_y-sin(pi*$)/3">
+                                          <p:val>
+                                            <p:fltVal val="0.5"/>
+                                          </p:val>
+                                        </p:tav>
+                                        <p:tav tm="100000">
+                                          <p:val>
+                                            <p:fltVal val="1"/>
+                                          </p:val>
+                                        </p:tav>
+                                      </p:tavLst>
+                                    </p:anim>
+                                    <p:anim calcmode="lin" valueType="num">
+                                      <p:cBhvr>
+                                        <p:cTn id="47" dur="664" tmFilter="0, 0; 0.125,0.2665; 0.25,0.4; 0.375,0.465; 0.5,0.5;  0.625,0.535; 0.75,0.6; 0.875,0.7335; 1,1">
+                                          <p:stCondLst>
+                                            <p:cond delay="664"/>
+                                          </p:stCondLst>
+                                        </p:cTn>
+                                        <p:tgtEl>
+                                          <p:spTgt spid="4">
+                                            <p:txEl>
+                                              <p:pRg st="2" end="2"/>
+                                            </p:txEl>
+                                          </p:spTgt>
+                                        </p:tgtEl>
+                                        <p:attrNameLst>
+                                          <p:attrName>ppt_y</p:attrName>
+                                        </p:attrNameLst>
+                                      </p:cBhvr>
+                                      <p:tavLst>
+                                        <p:tav tm="0" fmla="#ppt_y-sin(pi*$)/9">
+                                          <p:val>
+                                            <p:fltVal val="0"/>
+                                          </p:val>
+                                        </p:tav>
+                                        <p:tav tm="100000">
+                                          <p:val>
+                                            <p:fltVal val="1"/>
+                                          </p:val>
+                                        </p:tav>
+                                      </p:tavLst>
+                                    </p:anim>
+                                    <p:anim calcmode="lin" valueType="num">
+                                      <p:cBhvr>
+                                        <p:cTn id="48" dur="332" tmFilter="0, 0; 0.125,0.2665; 0.25,0.4; 0.375,0.465; 0.5,0.5;  0.625,0.535; 0.75,0.6; 0.875,0.7335; 1,1">
+                                          <p:stCondLst>
+                                            <p:cond delay="1324"/>
+                                          </p:stCondLst>
+                                        </p:cTn>
+                                        <p:tgtEl>
+                                          <p:spTgt spid="4">
+                                            <p:txEl>
+                                              <p:pRg st="2" end="2"/>
+                                            </p:txEl>
+                                          </p:spTgt>
+                                        </p:tgtEl>
+                                        <p:attrNameLst>
+                                          <p:attrName>ppt_y</p:attrName>
+                                        </p:attrNameLst>
+                                      </p:cBhvr>
+                                      <p:tavLst>
+                                        <p:tav tm="0" fmla="#ppt_y-sin(pi*$)/27">
+                                          <p:val>
+                                            <p:fltVal val="0"/>
+                                          </p:val>
+                                        </p:tav>
+                                        <p:tav tm="100000">
+                                          <p:val>
+                                            <p:fltVal val="1"/>
+                                          </p:val>
+                                        </p:tav>
+                                      </p:tavLst>
+                                    </p:anim>
+                                    <p:anim calcmode="lin" valueType="num">
+                                      <p:cBhvr>
+                                        <p:cTn id="49" dur="164" tmFilter="0, 0; 0.125,0.2665; 0.25,0.4; 0.375,0.465; 0.5,0.5;  0.625,0.535; 0.75,0.6; 0.875,0.7335; 1,1">
+                                          <p:stCondLst>
+                                            <p:cond delay="1656"/>
+                                          </p:stCondLst>
+                                        </p:cTn>
+                                        <p:tgtEl>
+                                          <p:spTgt spid="4">
+                                            <p:txEl>
+                                              <p:pRg st="2" end="2"/>
+                                            </p:txEl>
+                                          </p:spTgt>
+                                        </p:tgtEl>
+                                        <p:attrNameLst>
+                                          <p:attrName>ppt_y</p:attrName>
+                                        </p:attrNameLst>
+                                      </p:cBhvr>
+                                      <p:tavLst>
+                                        <p:tav tm="0" fmla="#ppt_y-sin(pi*$)/81">
+                                          <p:val>
+                                            <p:fltVal val="0"/>
+                                          </p:val>
+                                        </p:tav>
+                                        <p:tav tm="100000">
+                                          <p:val>
+                                            <p:fltVal val="1"/>
+                                          </p:val>
+                                        </p:tav>
+                                      </p:tavLst>
+                                    </p:anim>
+                                    <p:animScale>
+                                      <p:cBhvr>
+                                        <p:cTn id="50" dur="26">
+                                          <p:stCondLst>
+                                            <p:cond delay="650"/>
+                                          </p:stCondLst>
+                                        </p:cTn>
+                                        <p:tgtEl>
+                                          <p:spTgt spid="4">
+                                            <p:txEl>
+                                              <p:pRg st="2" end="2"/>
+                                            </p:txEl>
+                                          </p:spTgt>
+                                        </p:tgtEl>
+                                      </p:cBhvr>
+                                      <p:to x="100000" y="60000"/>
+                                    </p:animScale>
+                                    <p:animScale>
+                                      <p:cBhvr>
+                                        <p:cTn id="51" dur="166" decel="50000">
+                                          <p:stCondLst>
+                                            <p:cond delay="676"/>
+                                          </p:stCondLst>
+                                        </p:cTn>
+                                        <p:tgtEl>
+                                          <p:spTgt spid="4">
+                                            <p:txEl>
+                                              <p:pRg st="2" end="2"/>
+                                            </p:txEl>
+                                          </p:spTgt>
+                                        </p:tgtEl>
+                                      </p:cBhvr>
+                                      <p:to x="100000" y="100000"/>
+                                    </p:animScale>
+                                    <p:animScale>
+                                      <p:cBhvr>
+                                        <p:cTn id="52" dur="26">
+                                          <p:stCondLst>
+                                            <p:cond delay="1312"/>
+                                          </p:stCondLst>
+                                        </p:cTn>
+                                        <p:tgtEl>
+                                          <p:spTgt spid="4">
+                                            <p:txEl>
+                                              <p:pRg st="2" end="2"/>
+                                            </p:txEl>
+                                          </p:spTgt>
+                                        </p:tgtEl>
+                                      </p:cBhvr>
+                                      <p:to x="100000" y="80000"/>
+                                    </p:animScale>
+                                    <p:animScale>
+                                      <p:cBhvr>
+                                        <p:cTn id="53" dur="166" decel="50000">
+                                          <p:stCondLst>
+                                            <p:cond delay="1338"/>
+                                          </p:stCondLst>
+                                        </p:cTn>
+                                        <p:tgtEl>
+                                          <p:spTgt spid="4">
+                                            <p:txEl>
+                                              <p:pRg st="2" end="2"/>
+                                            </p:txEl>
+                                          </p:spTgt>
+                                        </p:tgtEl>
+                                      </p:cBhvr>
+                                      <p:to x="100000" y="100000"/>
+                                    </p:animScale>
+                                    <p:animScale>
+                                      <p:cBhvr>
+                                        <p:cTn id="54" dur="26">
+                                          <p:stCondLst>
+                                            <p:cond delay="1642"/>
+                                          </p:stCondLst>
+                                        </p:cTn>
+                                        <p:tgtEl>
+                                          <p:spTgt spid="4">
+                                            <p:txEl>
+                                              <p:pRg st="2" end="2"/>
+                                            </p:txEl>
+                                          </p:spTgt>
+                                        </p:tgtEl>
+                                      </p:cBhvr>
+                                      <p:to x="100000" y="90000"/>
+                                    </p:animScale>
+                                    <p:animScale>
+                                      <p:cBhvr>
+                                        <p:cTn id="55" dur="166" decel="50000">
+                                          <p:stCondLst>
+                                            <p:cond delay="1668"/>
+                                          </p:stCondLst>
+                                        </p:cTn>
+                                        <p:tgtEl>
+                                          <p:spTgt spid="4">
+                                            <p:txEl>
+                                              <p:pRg st="2" end="2"/>
+                                            </p:txEl>
+                                          </p:spTgt>
+                                        </p:tgtEl>
+                                      </p:cBhvr>
+                                      <p:to x="100000" y="100000"/>
+                                    </p:animScale>
+                                    <p:animScale>
+                                      <p:cBhvr>
+                                        <p:cTn id="56" dur="26">
+                                          <p:stCondLst>
+                                            <p:cond delay="1808"/>
+                                          </p:stCondLst>
+                                        </p:cTn>
+                                        <p:tgtEl>
+                                          <p:spTgt spid="4">
+                                            <p:txEl>
+                                              <p:pRg st="2" end="2"/>
+                                            </p:txEl>
+                                          </p:spTgt>
+                                        </p:tgtEl>
+                                      </p:cBhvr>
+                                      <p:to x="100000" y="95000"/>
+                                    </p:animScale>
+                                    <p:animScale>
+                                      <p:cBhvr>
+                                        <p:cTn id="57" dur="166" decel="50000">
+                                          <p:stCondLst>
+                                            <p:cond delay="1834"/>
+                                          </p:stCondLst>
+                                        </p:cTn>
+                                        <p:tgtEl>
+                                          <p:spTgt spid="4">
+                                            <p:txEl>
+                                              <p:pRg st="2" end="2"/>
+                                            </p:txEl>
+                                          </p:spTgt>
+                                        </p:tgtEl>
+                                      </p:cBhvr>
+                                      <p:to x="100000" y="100000"/>
+                                    </p:animScale>
+                                  </p:childTnLst>
+                                </p:cTn>
+                              </p:par>
+                              <p:par>
+                                <p:cTn id="58" presetID="26" presetClass="entr" presetSubtype="0" fill="hold" nodeType="withEffect">
+                                  <p:stCondLst>
+                                    <p:cond delay="0"/>
+                                  </p:stCondLst>
+                                  <p:childTnLst>
+                                    <p:set>
+                                      <p:cBhvr>
+                                        <p:cTn id="59" dur="1" fill="hold">
+                                          <p:stCondLst>
+                                            <p:cond delay="0"/>
+                                          </p:stCondLst>
+                                        </p:cTn>
+                                        <p:tgtEl>
+                                          <p:spTgt spid="4">
+                                            <p:txEl>
+                                              <p:pRg st="3" end="3"/>
+                                            </p:txEl>
+                                          </p:spTgt>
+                                        </p:tgtEl>
+                                        <p:attrNameLst>
+                                          <p:attrName>style.visibility</p:attrName>
+                                        </p:attrNameLst>
+                                      </p:cBhvr>
+                                      <p:to>
+                                        <p:strVal val="visible"/>
+                                      </p:to>
+                                    </p:set>
+                                    <p:animEffect transition="in" filter="wipe(down)">
+                                      <p:cBhvr>
+                                        <p:cTn id="60" dur="580">
+                                          <p:stCondLst>
+                                            <p:cond delay="0"/>
+                                          </p:stCondLst>
+                                        </p:cTn>
+                                        <p:tgtEl>
+                                          <p:spTgt spid="4">
+                                            <p:txEl>
+                                              <p:pRg st="3" end="3"/>
+                                            </p:txEl>
+                                          </p:spTgt>
+                                        </p:tgtEl>
+                                      </p:cBhvr>
+                                    </p:animEffect>
+                                    <p:anim calcmode="lin" valueType="num">
+                                      <p:cBhvr>
+                                        <p:cTn id="61" dur="1822" tmFilter="0,0; 0.14,0.36; 0.43,0.73; 0.71,0.91; 1.0,1.0">
+                                          <p:stCondLst>
+                                            <p:cond delay="0"/>
+                                          </p:stCondLst>
+                                        </p:cTn>
+                                        <p:tgtEl>
+                                          <p:spTgt spid="4">
+                                            <p:txEl>
+                                              <p:pRg st="3" end="3"/>
+                                            </p:txEl>
+                                          </p:spTgt>
+                                        </p:tgtEl>
+                                        <p:attrNameLst>
+                                          <p:attrName>ppt_x</p:attrName>
+                                        </p:attrNameLst>
+                                      </p:cBhvr>
+                                      <p:tavLst>
+                                        <p:tav tm="0">
+                                          <p:val>
+                                            <p:strVal val="#ppt_x-0.25"/>
+                                          </p:val>
+                                        </p:tav>
+                                        <p:tav tm="100000">
+                                          <p:val>
+                                            <p:strVal val="#ppt_x"/>
+                                          </p:val>
+                                        </p:tav>
+                                      </p:tavLst>
+                                    </p:anim>
+                                    <p:anim calcmode="lin" valueType="num">
+                                      <p:cBhvr>
+                                        <p:cTn id="62" dur="664" tmFilter="0.0,0.0; 0.25,0.07; 0.50,0.2; 0.75,0.467; 1.0,1.0">
+                                          <p:stCondLst>
+                                            <p:cond delay="0"/>
+                                          </p:stCondLst>
+                                        </p:cTn>
+                                        <p:tgtEl>
+                                          <p:spTgt spid="4">
+                                            <p:txEl>
+                                              <p:pRg st="3" end="3"/>
+                                            </p:txEl>
+                                          </p:spTgt>
+                                        </p:tgtEl>
+                                        <p:attrNameLst>
+                                          <p:attrName>ppt_y</p:attrName>
+                                        </p:attrNameLst>
+                                      </p:cBhvr>
+                                      <p:tavLst>
+                                        <p:tav tm="0" fmla="#ppt_y-sin(pi*$)/3">
+                                          <p:val>
+                                            <p:fltVal val="0.5"/>
+                                          </p:val>
+                                        </p:tav>
+                                        <p:tav tm="100000">
+                                          <p:val>
+                                            <p:fltVal val="1"/>
+                                          </p:val>
+                                        </p:tav>
+                                      </p:tavLst>
+                                    </p:anim>
+                                    <p:anim calcmode="lin" valueType="num">
+                                      <p:cBhvr>
+                                        <p:cTn id="63" dur="664" tmFilter="0, 0; 0.125,0.2665; 0.25,0.4; 0.375,0.465; 0.5,0.5;  0.625,0.535; 0.75,0.6; 0.875,0.7335; 1,1">
+                                          <p:stCondLst>
+                                            <p:cond delay="664"/>
+                                          </p:stCondLst>
+                                        </p:cTn>
+                                        <p:tgtEl>
+                                          <p:spTgt spid="4">
+                                            <p:txEl>
+                                              <p:pRg st="3" end="3"/>
+                                            </p:txEl>
+                                          </p:spTgt>
+                                        </p:tgtEl>
+                                        <p:attrNameLst>
+                                          <p:attrName>ppt_y</p:attrName>
+                                        </p:attrNameLst>
+                                      </p:cBhvr>
+                                      <p:tavLst>
+                                        <p:tav tm="0" fmla="#ppt_y-sin(pi*$)/9">
+                                          <p:val>
+                                            <p:fltVal val="0"/>
+                                          </p:val>
+                                        </p:tav>
+                                        <p:tav tm="100000">
+                                          <p:val>
+                                            <p:fltVal val="1"/>
+                                          </p:val>
+                                        </p:tav>
+                                      </p:tavLst>
+                                    </p:anim>
+                                    <p:anim calcmode="lin" valueType="num">
+                                      <p:cBhvr>
+                                        <p:cTn id="64" dur="332" tmFilter="0, 0; 0.125,0.2665; 0.25,0.4; 0.375,0.465; 0.5,0.5;  0.625,0.535; 0.75,0.6; 0.875,0.7335; 1,1">
+                                          <p:stCondLst>
+                                            <p:cond delay="1324"/>
+                                          </p:stCondLst>
+                                        </p:cTn>
+                                        <p:tgtEl>
+                                          <p:spTgt spid="4">
+                                            <p:txEl>
+                                              <p:pRg st="3" end="3"/>
+                                            </p:txEl>
+                                          </p:spTgt>
+                                        </p:tgtEl>
+                                        <p:attrNameLst>
+                                          <p:attrName>ppt_y</p:attrName>
+                                        </p:attrNameLst>
+                                      </p:cBhvr>
+                                      <p:tavLst>
+                                        <p:tav tm="0" fmla="#ppt_y-sin(pi*$)/27">
+                                          <p:val>
+                                            <p:fltVal val="0"/>
+                                          </p:val>
+                                        </p:tav>
+                                        <p:tav tm="100000">
+                                          <p:val>
+                                            <p:fltVal val="1"/>
+                                          </p:val>
+                                        </p:tav>
+                                      </p:tavLst>
+                                    </p:anim>
+                                    <p:anim calcmode="lin" valueType="num">
+                                      <p:cBhvr>
+                                        <p:cTn id="65" dur="164" tmFilter="0, 0; 0.125,0.2665; 0.25,0.4; 0.375,0.465; 0.5,0.5;  0.625,0.535; 0.75,0.6; 0.875,0.7335; 1,1">
+                                          <p:stCondLst>
+                                            <p:cond delay="1656"/>
+                                          </p:stCondLst>
+                                        </p:cTn>
+                                        <p:tgtEl>
+                                          <p:spTgt spid="4">
+                                            <p:txEl>
+                                              <p:pRg st="3" end="3"/>
+                                            </p:txEl>
+                                          </p:spTgt>
+                                        </p:tgtEl>
+                                        <p:attrNameLst>
+                                          <p:attrName>ppt_y</p:attrName>
+                                        </p:attrNameLst>
+                                      </p:cBhvr>
+                                      <p:tavLst>
+                                        <p:tav tm="0" fmla="#ppt_y-sin(pi*$)/81">
+                                          <p:val>
+                                            <p:fltVal val="0"/>
+                                          </p:val>
+                                        </p:tav>
+                                        <p:tav tm="100000">
+                                          <p:val>
+                                            <p:fltVal val="1"/>
+                                          </p:val>
+                                        </p:tav>
+                                      </p:tavLst>
+                                    </p:anim>
+                                    <p:animScale>
+                                      <p:cBhvr>
+                                        <p:cTn id="66" dur="26">
+                                          <p:stCondLst>
+                                            <p:cond delay="650"/>
+                                          </p:stCondLst>
+                                        </p:cTn>
+                                        <p:tgtEl>
+                                          <p:spTgt spid="4">
+                                            <p:txEl>
+                                              <p:pRg st="3" end="3"/>
+                                            </p:txEl>
+                                          </p:spTgt>
+                                        </p:tgtEl>
+                                      </p:cBhvr>
+                                      <p:to x="100000" y="60000"/>
+                                    </p:animScale>
+                                    <p:animScale>
+                                      <p:cBhvr>
+                                        <p:cTn id="67" dur="166" decel="50000">
+                                          <p:stCondLst>
+                                            <p:cond delay="676"/>
+                                          </p:stCondLst>
+                                        </p:cTn>
+                                        <p:tgtEl>
+                                          <p:spTgt spid="4">
+                                            <p:txEl>
+                                              <p:pRg st="3" end="3"/>
+                                            </p:txEl>
+                                          </p:spTgt>
+                                        </p:tgtEl>
+                                      </p:cBhvr>
+                                      <p:to x="100000" y="100000"/>
+                                    </p:animScale>
+                                    <p:animScale>
+                                      <p:cBhvr>
+                                        <p:cTn id="68" dur="26">
+                                          <p:stCondLst>
+                                            <p:cond delay="1312"/>
+                                          </p:stCondLst>
+                                        </p:cTn>
+                                        <p:tgtEl>
+                                          <p:spTgt spid="4">
+                                            <p:txEl>
+                                              <p:pRg st="3" end="3"/>
+                                            </p:txEl>
+                                          </p:spTgt>
+                                        </p:tgtEl>
+                                      </p:cBhvr>
+                                      <p:to x="100000" y="80000"/>
+                                    </p:animScale>
+                                    <p:animScale>
+                                      <p:cBhvr>
+                                        <p:cTn id="69" dur="166" decel="50000">
+                                          <p:stCondLst>
+                                            <p:cond delay="1338"/>
+                                          </p:stCondLst>
+                                        </p:cTn>
+                                        <p:tgtEl>
+                                          <p:spTgt spid="4">
+                                            <p:txEl>
+                                              <p:pRg st="3" end="3"/>
+                                            </p:txEl>
+                                          </p:spTgt>
+                                        </p:tgtEl>
+                                      </p:cBhvr>
+                                      <p:to x="100000" y="100000"/>
+                                    </p:animScale>
+                                    <p:animScale>
+                                      <p:cBhvr>
+                                        <p:cTn id="70" dur="26">
+                                          <p:stCondLst>
+                                            <p:cond delay="1642"/>
+                                          </p:stCondLst>
+                                        </p:cTn>
+                                        <p:tgtEl>
+                                          <p:spTgt spid="4">
+                                            <p:txEl>
+                                              <p:pRg st="3" end="3"/>
+                                            </p:txEl>
+                                          </p:spTgt>
+                                        </p:tgtEl>
+                                      </p:cBhvr>
+                                      <p:to x="100000" y="90000"/>
+                                    </p:animScale>
+                                    <p:animScale>
+                                      <p:cBhvr>
+                                        <p:cTn id="71" dur="166" decel="50000">
+                                          <p:stCondLst>
+                                            <p:cond delay="1668"/>
+                                          </p:stCondLst>
+                                        </p:cTn>
+                                        <p:tgtEl>
+                                          <p:spTgt spid="4">
+                                            <p:txEl>
+                                              <p:pRg st="3" end="3"/>
+                                            </p:txEl>
+                                          </p:spTgt>
+                                        </p:tgtEl>
+                                      </p:cBhvr>
+                                      <p:to x="100000" y="100000"/>
+                                    </p:animScale>
+                                    <p:animScale>
+                                      <p:cBhvr>
+                                        <p:cTn id="72" dur="26">
+                                          <p:stCondLst>
+                                            <p:cond delay="1808"/>
+                                          </p:stCondLst>
+                                        </p:cTn>
+                                        <p:tgtEl>
+                                          <p:spTgt spid="4">
+                                            <p:txEl>
+                                              <p:pRg st="3" end="3"/>
+                                            </p:txEl>
+                                          </p:spTgt>
+                                        </p:tgtEl>
+                                      </p:cBhvr>
+                                      <p:to x="100000" y="95000"/>
+                                    </p:animScale>
+                                    <p:animScale>
+                                      <p:cBhvr>
+                                        <p:cTn id="73" dur="166" decel="50000">
+                                          <p:stCondLst>
+                                            <p:cond delay="1834"/>
+                                          </p:stCondLst>
+                                        </p:cTn>
+                                        <p:tgtEl>
+                                          <p:spTgt spid="4">
+                                            <p:txEl>
+                                              <p:pRg st="3" end="3"/>
+                                            </p:txEl>
+                                          </p:spTgt>
+                                        </p:tgtEl>
+                                      </p:cBhvr>
+                                      <p:to x="100000" y="100000"/>
+                                    </p:animScale>
                                   </p:childTnLst>
                                 </p:cTn>
                               </p:par>
